--- a/it/slides/08-Architettura_dei_Calcolatori-Algebra_di_Boole_1.pptx
+++ b/it/slides/08-Architettura_dei_Calcolatori-Algebra_di_Boole_1.pptx
@@ -125,13 +125,13 @@
   <p:extLst>
     <p:ext uri="{521415D9-36F7-43E2-AB2F-B90AF26B5E84}">
       <p14:sectionLst xmlns:p14="http://schemas.microsoft.com/office/powerpoint/2010/main">
-        <p14:section name="Apertura" id="{aee9ed91-e57b-a0f2-8775-a1dc0f684f50}">
+        <p14:section name="Apertura" id="{c4bdd854-f092-3f7f-c5b3-1444443c9398}">
           <p14:sldIdLst>
             <p14:sldId id="256"/>
             <p14:sldId id="257"/>
           </p14:sldIdLst>
         </p14:section>
-        <p14:section name="Il calcolatore come macchina logica" id="{8ca40c2d-7c93-01cc-1267-c37f160038d7}">
+        <p14:section name="Il calcolatore come macchina logica" id="{001c2cb5-707b-1328-3042-fefdf2e8a0b8}">
           <p14:sldIdLst>
             <p14:sldId id="258"/>
             <p14:sldId id="259"/>
@@ -140,7 +140,7 @@
             <p14:sldId id="262"/>
           </p14:sldIdLst>
         </p14:section>
-        <p14:section name="Algebra di Boole" id="{e7645a28-a2ce-1db4-1c9c-eeba90e7e324}">
+        <p14:section name="Algebra di Boole" id="{7271e5df-d31b-5a11-efec-c0e0e385b7ca}">
           <p14:sldIdLst>
             <p14:sldId id="263"/>
             <p14:sldId id="264"/>
@@ -152,7 +152,7 @@
             <p14:sldId id="270"/>
           </p14:sldIdLst>
         </p14:section>
-        <p14:section name="Ritorno alla macchina" id="{d0bde8cc-9a37-3dda-f842-e303c1df686f}">
+        <p14:section name="Ritorno alla macchina" id="{df892871-17bf-06bb-d60e-c7e4a5cf417e}">
           <p14:sldIdLst>
             <p14:sldId id="271"/>
             <p14:sldId id="272"/>
@@ -3198,7 +3198,63 @@
       </p:sp>
       <p:sp>
         <p:nvSpPr>
-          <p:cNvPr id="12" name="Shape 10"/>
+          <p:cNvPr id="12" name="Text 10"/>
+          <p:cNvSpPr txBox="1"/>
+          <p:nvPr/>
+        </p:nvSpPr>
+        <p:spPr>
+          <a:xfrm>
+            <a:off x="4693615" y="566928"/>
+            <a:ext cx="6949440" cy="640080"/>
+          </a:xfrm>
+          <a:prstGeom prst="rect">
+            <a:avLst/>
+          </a:prstGeom>
+          <a:noFill/>
+          <a:ln/>
+        </p:spPr>
+        <p:txBody>
+          <a:bodyPr wrap="square" lIns="0" tIns="0" rIns="0" bIns="0" rtlCol="0" anchor="t"/>
+          <a:lstStyle/>
+          <a:p>
+            <a:pPr algn="r" indent="0" marL="0">
+              <a:buNone/>
+            </a:pPr>
+            <a:r>
+              <a:rPr lang="en-US" sz="1300" dirty="0">
+                <a:solidFill>
+                  <a:srgbClr val="CFE3EA"/>
+                </a:solidFill>
+                <a:latin typeface="Calibri" pitchFamily="34" charset="0"/>
+                <a:ea typeface="Calibri" pitchFamily="34" charset="-122"/>
+                <a:cs typeface="Calibri" pitchFamily="34" charset="-120"/>
+              </a:rPr>
+              <a:t>Presentazione della lezione. I listati, il programma completo e come provarlo sono nella presentazione del codice:</a:t>
+            </a:r>
+            <a:endParaRPr lang="en-US" sz="1300" dirty="0"/>
+          </a:p>
+          <a:p>
+            <a:pPr algn="r" indent="0" marL="0">
+              <a:buNone/>
+            </a:pPr>
+            <a:r>
+              <a:rPr lang="en-US" sz="1300" dirty="0">
+                <a:solidFill>
+                  <a:srgbClr val="CFE3EA"/>
+                </a:solidFill>
+                <a:latin typeface="Calibri" pitchFamily="34" charset="0"/>
+                <a:ea typeface="Calibri" pitchFamily="34" charset="-122"/>
+                <a:cs typeface="Calibri" pitchFamily="34" charset="-120"/>
+              </a:rPr>
+              <a:t>08-Architettura_dei_Calcolatori-Algebra_di_Boole_1-Codice.pptx</a:t>
+            </a:r>
+            <a:endParaRPr lang="en-US" sz="1300" dirty="0"/>
+          </a:p>
+        </p:txBody>
+      </p:sp>
+      <p:sp>
+        <p:nvSpPr>
+          <p:cNvPr id="13" name="Shape 11"/>
           <p:cNvSpPr/>
           <p:nvPr/>
         </p:nvSpPr>
@@ -3225,7 +3281,7 @@
       </p:sp>
       <p:pic>
         <p:nvPicPr>
-          <p:cNvPr id="13" name="Image 0" descr="/Users/raffaelemontella/devel/riscv-prg32/computer-architecture-with-prg32/tools/assets/lab2_step1_lamps.png">    </p:cNvPr>
+          <p:cNvPr id="14" name="Image 0" descr="/Users/raffaelemontella/devel/riscv-prg32/computer-architecture-with-prg32/tools/assets/lab2_step1_lamps.png">    </p:cNvPr>
           <p:cNvPicPr>
             <a:picLocks noChangeAspect="1"/>
           </p:cNvPicPr>

--- a/it/slides/08-Architettura_dei_Calcolatori-Algebra_di_Boole_1.pptx
+++ b/it/slides/08-Architettura_dei_Calcolatori-Algebra_di_Boole_1.pptx
@@ -125,13 +125,13 @@
   <p:extLst>
     <p:ext uri="{521415D9-36F7-43E2-AB2F-B90AF26B5E84}">
       <p14:sectionLst xmlns:p14="http://schemas.microsoft.com/office/powerpoint/2010/main">
-        <p14:section name="Apertura" id="{c4bdd854-f092-3f7f-c5b3-1444443c9398}">
+        <p14:section name="Apertura" id="{d148395e-e9a2-6cb2-e8d1-234e251d7406}">
           <p14:sldIdLst>
             <p14:sldId id="256"/>
             <p14:sldId id="257"/>
           </p14:sldIdLst>
         </p14:section>
-        <p14:section name="Il calcolatore come macchina logica" id="{001c2cb5-707b-1328-3042-fefdf2e8a0b8}">
+        <p14:section name="Il calcolatore come macchina logica" id="{92584dc6-ef93-8ebe-bee3-81b4b3967e7c}">
           <p14:sldIdLst>
             <p14:sldId id="258"/>
             <p14:sldId id="259"/>
@@ -140,7 +140,7 @@
             <p14:sldId id="262"/>
           </p14:sldIdLst>
         </p14:section>
-        <p14:section name="Algebra di Boole" id="{7271e5df-d31b-5a11-efec-c0e0e385b7ca}">
+        <p14:section name="Algebra di Boole" id="{c7925e41-68f6-3e50-f2f7-125ba62b5a2a}">
           <p14:sldIdLst>
             <p14:sldId id="263"/>
             <p14:sldId id="264"/>
@@ -152,7 +152,7 @@
             <p14:sldId id="270"/>
           </p14:sldIdLst>
         </p14:section>
-        <p14:section name="Ritorno alla macchina" id="{df892871-17bf-06bb-d60e-c7e4a5cf417e}">
+        <p14:section name="Ritorno alla macchina" id="{f5205dee-e6bd-6df9-37b7-f3531cd2cd38}">
           <p14:sldIdLst>
             <p14:sldId id="271"/>
             <p14:sldId id="272"/>
@@ -565,6 +565,8 @@
             <a:r>
               <a:rPr lang="en-US" dirty="0"/>
               <a:t>Comincia il secondo blocco del corso: la logica. Dopo aver imparato che cosa significano i bit, imparate come si combinano. In realtà usate l'algebra di Boole fin dai primi giorni, ogni volta che avete esaminato un pulsante con andi; questa lezione dà un nome a quell'operazione e le costruisce attorno l'algebra. Il Bianconiglio in copertina va sempre di fretta: anche il processore fa tutto a minuscoli passi logici, miliardi al secondo.
+Stato di apprendimento: DA COMPRENDERE OGGI, alla fine di questa lezione lo spiegate, lo seguite passo passo e lo applicate da soli; DA UTILIZZARE OGGI, oggi seguite e usate la ricetta; come funziona dentro si spiega più avanti, o non fa parte del corso; DA COMPRENDERE PIÙ AVANTI, riconoscete il nome e lo scopo; lo spiega una lezione successiva. Una slide senza etichetta è contesto: una storia, un esempio, una domanda, un esercizio.
+Stato di apprendimento di questa lezione. DA COMPRENDERE OGGI: le maschere di bit; l'architettura di von Neumann; analisi e sintesi; l'algebra di Boole; le porte logiche. DA UTILIZZARE OGGI: il programma completo, gli strumenti di PRG32 (si usa, non si studia, in questo corso). DA COMPRENDERE PIÙ AVANTI: minimizzazione, Karnaugh (Lezione 09). Una slide senza etichetta è contesto: una storia, un esempio, una domanda, un esercizio.
 Per il docente: Spirale: gli studenti usano andi per esaminare un pulsante fin dai primi giorni. La lezione dà un nome a ciò che hanno fatto (una maschera è un AND), poi costruisce l'algebra, poi torna alle istruzioni bit a bit.</a:t>
             </a:r>
             <a:endParaRPr lang="en-US" dirty="0"/>
@@ -654,6 +656,7 @@
             <a:r>
               <a:rPr lang="en-US" dirty="0"/>
               <a:t>Altre tre porte. XOR, l'or esclusivo, dà 1 quando i due ingressi sono diversi: è il bit di somma di un'addizione a un bit. NAND e NOR sono AND e OR seguiti da una negazione: il cerchietto sull'uscita di un simbolo significa sempre NOT. NAND dà 0 solo quando entrambi gli ingressi valgono 1; NOR dà 1 solo quando entrambi valgono 0. In pratica contano perché sono le porte più economiche da costruire con i transistor, come mostrerà la Lezione 10.
+DA COMPRENDERE OGGI: le porte logiche.
 Per il docente: Slide nuova. XOR vale 1 quando gli ingressi sono diversi: è il bit di somma di un'addizione, e RISC-V lo ha come istruzione. Il cerchietto su un simbolo significa negazione.</a:t>
             </a:r>
             <a:endParaRPr lang="en-US" dirty="0"/>
@@ -743,6 +746,7 @@
             <a:r>
               <a:rPr lang="en-US" dirty="0"/>
               <a:t>Le prime quattro proprietà, ciascuna in due forme, una per AND e una per OR. Commutativa e associativa sono come nell'algebra ordinaria; grazie alla seconda, AND e OR si estendono a un numero qualsiasi di operandi. L'idempotenza è nuova: x AND x è x, e x OR x è x; ripetere una variabile non aggiunge nulla. L'assorbimento è la più utile per semplificare: x OR (x AND y) è semplicemente x, perché quando x vale 1 il risultato è 1 qualunque sia y, e quando x vale 0 entrambi i termini valgono 0.
+DA COMPRENDERE OGGI: l'algebra di Boole.
 Per il docente: Grazie alla proprietà associativa AND e OR si possono definire su più di due operandi: x . y . z. Ogni proprietà viene in coppia: si scambia AND con OR.</a:t>
             </a:r>
             <a:endParaRPr lang="en-US" dirty="0"/>
@@ -832,6 +836,7 @@
             <a:r>
               <a:rPr lang="en-US" dirty="0"/>
               <a:t>Altre cinque proprietà. La prima legge distributiva è quella consueta. La seconda, x + yz = (x + y)(x + z), non ha equivalente nell'algebra ordinaria: qui anche OR si distribuisce rispetto ad AND. Poi le costanti: 1 è l'elemento neutro per AND e 0 per OR; 0 annulla un AND e 1 satura un OR. Le leggi del complemento dicono che una variabile e la sua negazione danno 0 con AND e 1 con OR. Involuzione: negare due volte restituisce la variabile. Due di queste, elemento neutro ed elemento nullo, spiegano come funziona una maschera.
+DA COMPRENDERE OGGI: l'algebra di Boole.
 Per il docente: La seconda legge distributiva non ha un corrispettivo nell'algebra ordinaria. La slide originale chiamava l'involuzione «convoluzione» e raggruppava elemento neutro ed elemento nullo come «minimo e massimo»; le leggi del complemento sono aggiunte qui.</a:t>
             </a:r>
             <a:endParaRPr lang="en-US" dirty="0"/>
@@ -921,6 +926,7 @@
             <a:r>
               <a:rPr lang="en-US" dirty="0"/>
               <a:t>Le leggi di De Morgan collegano le tre operazioni: il complemento di un prodotto è la somma dei complementi, e il complemento di una somma è il prodotto dei complementi. La tabella dimostra la prima per induzione perfetta: poiché le variabili hanno solo due valori, una legge si verifica controllando ogni riga. Le due colonne evidenziate sono identiche. In termini di porte: un NAND è un OR con gli ingressi negati. Userete queste leggi di continuo, su carta e nei programmi.
+DA COMPRENDERE OGGI: l'algebra di Boole.
 Per il docente: Augustus De Morgan, 1847. Le leggi si generalizzano a un numero qualsiasi di variabili. La presentazione originale mostrava la dimostrazione come immagine.</a:t>
             </a:r>
             <a:endParaRPr lang="en-US" dirty="0"/>
@@ -1010,6 +1016,7 @@
             <a:r>
               <a:rPr lang="en-US" dirty="0"/>
               <a:t>Due regole generali. Dualità: ogni identità resta vera scambiando AND con OR e 0 con 1; per questo le proprietà venivano a coppie, e dimostrarle costa la metà. Precedenza: prima si applica NOT, poi AND, poi OR, come le potenze vengono prima dei prodotti e i prodotti prima delle somme; le parentesi cambiano l'ordine. E una definizione da ricordare: due espressioni sono equivalenti quando hanno la stessa tabella di verità.
+DA COMPRENDERE OGGI: l'algebra di Boole.
 Per il docente: La dualità dimezza il lavoro: dimostrata una legge di ogni coppia, l'altra segue.</a:t>
             </a:r>
             <a:endParaRPr lang="en-US" dirty="0"/>
@@ -1099,6 +1106,7 @@
             <a:r>
               <a:rPr lang="en-US" dirty="0"/>
               <a:t>L'algebra al lavoro. L'espressione xy + xy' richiede due porte AND, una OR e un invertitore. Raccogliendo x con la legge distributiva si ottiene x(y + y'); la legge del complemento trasforma la parentesi in 1; l'elemento neutro lascia x. Tre porte sono diventate un pezzo di filo. Ogni riga della tabella nomina la legge che la giustifica: quando semplificate, siate sempre in grado di dire quale legge state applicando. La didascalia mostra una seconda semplificazione che servirà ancora.
+DA COMPRENDERE OGGI: l'algebra di Boole.
 Per il docente: Due letterali e tre porte diventano un filo. L'identità nella didascalia (detta a volte teorema di semplificazione) usa la distributività di OR rispetto ad AND; la si riusa nella Lezione 09.</a:t>
             </a:r>
             <a:endParaRPr lang="en-US" dirty="0"/>
@@ -1458,6 +1466,7 @@
             <a:r>
               <a:rPr lang="en-US" dirty="0"/>
               <a:t>Quattro conclusioni. L'architettura di von Neumann descrive in forma semplificata una macchina reale. L'algebra di Boole descrive funzioni logiche che i circuiti elettronici possono realizzare. Tre operazioni, poche proprietà e le leggi di De Morgan bastano a trasformare qualunque espressione. E un'istruzione bit a bit è l'algebra applicata a trentadue bit insieme, con la maschera come legge dell'elemento neutro al lavoro. La prossima lezione passa dagli operatori alle funzioni: forme canoniche e minimizzazione.
+Stato di apprendimento, riepilogo. DA COMPRENDERE OGGI: le maschere di bit; l'architettura di von Neumann; analisi e sintesi; l'algebra di Boole; le porte logiche. DA UTILIZZARE OGGI: il programma completo, gli strumenti di PRG32 (si usa, non si studia, in questo corso). DA COMPRENDERE PIÙ AVANTI: minimizzazione, Karnaugh (Lezione 09). Una slide senza etichetta è contesto: una storia, un esempio, una domanda, un esercizio.
 Per il docente: Prossima lezione: funzioni booleane, forme canoniche e minimizzazione.</a:t>
             </a:r>
             <a:endParaRPr lang="en-US" dirty="0"/>
@@ -1635,6 +1644,7 @@
             <a:r>
               <a:rPr lang="en-US" dirty="0"/>
               <a:t>Un calcolatore ha tre sottosistemi: il processore, che esegue le istruzioni; la memoria centrale, che contiene istruzioni e dati; e l'ingresso/uscita, che collega la macchina al mondo. Sono uniti da un bus, un insieme di fili condivisi diviso in linee degli indirizzi, linee dei dati e linee di controllo. È il modello di von Neumann della Lezione 03 in termini odierni. Tutto ciò che viaggia sul bus è una configurazione di bit. Sull'ESP32-C6 tutto questo sta dentro un solo chip.
+DA COMPRENDERE OGGI: l'architettura di von Neumann.
 Per il docente: Sostituisce le due figure della presentazione originale (modello di von Neumann; architettura a bus). Sull'ESP32-C6 i tre sottosistemi e il bus stanno tutti dentro un solo chip.</a:t>
             </a:r>
             <a:endParaRPr lang="en-US" dirty="0"/>
@@ -1724,6 +1734,7 @@
             <a:r>
               <a:rPr lang="en-US" dirty="0"/>
               <a:t>Nel processore risiede la capacità di elaborazione. Esegue istruzioni, che sono comandi espliciti di due tipi: quelli che governano il trasferimento dell'informazione, dentro il calcolatore e da e verso i dispositivi, e quelli che specificano operazioni aritmetiche e logiche. La memoria contiene i dati e la sequenza delle istruzioni, e una sequenza di istruzioni memorizzata è un programma. Il processore fa una cosa sola, all'infinito: preleva un'istruzione, la esegue, e ripete.
+DA COMPRENDERE OGGI: l'architettura di von Neumann.
 Per il docente: RV32I: circa quaranta istruzioni. Avete usato addi, lw, sw, andi, beqz, call e ret: trasferimento, aritmetica, logica e controllo ci sono tutti.</a:t>
             </a:r>
             <a:endParaRPr lang="en-US" dirty="0"/>
@@ -1812,7 +1823,8 @@
           <a:p>
             <a:r>
               <a:rPr lang="en-US" dirty="0"/>
-              <a:t>Quattro aggettivi definiscono un calcolatore elettronico. Numerico, o digitale: tutta l'informazione è fatta di stringhe di bit. Automatico: una volta avviato procede da solo. A programma memorizzato: il programma sta in memoria e si può sostituire, quindi la stessa macchina fa lavori diversi. Elettronico: è costruito con circuiti che memorizzano ed elaborano bit. Ogni aggettivo esclude qualcosa: un abaco è numerico ma non automatico; un carillon meccanico è automatico ma il suo programma è fisso.</a:t>
+              <a:t>Quattro aggettivi definiscono un calcolatore elettronico. Numerico, o digitale: tutta l'informazione è fatta di stringhe di bit. Automatico: una volta avviato procede da solo. A programma memorizzato: il programma sta in memoria e si può sostituire, quindi la stessa macchina fa lavori diversi. Elettronico: è costruito con circuiti che memorizzano ed elaborano bit. Ogni aggettivo esclude qualcosa: un abaco è numerico ma non automatico; un carillon meccanico è automatico ma il suo programma è fisso.
+DA COMPRENDERE OGGI: l'architettura di von Neumann.</a:t>
             </a:r>
             <a:endParaRPr lang="en-US" dirty="0"/>
           </a:p>
@@ -1901,6 +1913,7 @@
             <a:r>
               <a:rPr lang="en-US" dirty="0"/>
               <a:t>I circuiti che memorizzano ed elaborano i bit si chiamano circuiti di commutazione, o circuiti logici; collegati tra loro formano una rete di commutazione, e progettarne una è il progetto logico. Per descrivere ciò che fanno questi circuiti si usa un'algebra. Svolge per i circuiti il ruolo che l'algebra ordinaria svolge per le grandezze: una notazione in cui si può calcolare invece di provare ogni caso. I valori sono due, 0 e 1: due livelli di tensione, due stati di un interruttore.
+DA COMPRENDERE OGGI: analisi e sintesi.
 Per il docente: Circuiti di commutazione: switching circuits. L'algebra è quella di Boole (1854), applicata agli interruttori da Nakajima e Shannon negli anni Trenta (Lezione 03).</a:t>
             </a:r>
             <a:endParaRPr lang="en-US" dirty="0"/>
@@ -1990,6 +2003,7 @@
             <a:r>
               <a:rPr lang="en-US" dirty="0"/>
               <a:t>Due problemi, e una sola algebra per entrambi. Analisi: è data la struttura di un circuito, come è fatto, e se ne deve trovare il comportamento, che cosa fa. Leggere andi t3, t0, 1 e dire che cosa finisce in t3 è analisi. La sintesi va nell'altro verso: da un comportamento desiderato a una struttura che lo realizza, per esempio dalla tabella di una somma a un addizionatore. La sintesi ha di solito molte soluzioni; scegliere la più economica è l'argomento della prossima lezione.
+DA COMPRENDERE OGGI: analisi e sintesi. DA COMPRENDERE PIÙ AVANTI: minimizzazione, Karnaugh (si studia nella Lezione 09).
 Per il docente: La sintesi ha di solito molte soluzioni; scegliere la più economica è il problema di minimizzazione della Lezione 09.</a:t>
             </a:r>
             <a:endParaRPr lang="en-US" dirty="0"/>
@@ -2079,6 +2093,7 @@
             <a:r>
               <a:rPr lang="en-US" dirty="0"/>
               <a:t>Nell'algebra di Boole una variabile può assumere solo due valori, 0 e 1, e le operazioni di base sono tre. AND, il prodotto logico, scritto con un punto o semplicemente accostando le variabili. OR, la somma logica, scritta con il segno più. NOT, il complemento, scritto qui con un apice, come in x', per poterlo battere a tastiera. Non fatevi ingannare dai simboli: il più non è una somma aritmetica, come vedrete subito nella tabella di verità di OR.
+DA COMPRENDERE OGGI: l'algebra di Boole.
 Per il docente: Congiunzione, disgiunzione, negazione: conjunction, disjunction, negation. In queste slide il complemento si scrive con un apice (x') per poterlo battere a tastiera.</a:t>
             </a:r>
             <a:endParaRPr lang="en-US" dirty="0"/>
@@ -2168,6 +2183,7 @@
             <a:r>
               <a:rPr lang="en-US" dirty="0"/>
               <a:t>Ogni riquadro mostra un'operazione in tre modi: il simbolo della porta, la notazione e la tabella di verità, che elenca l'uscita per ogni combinazione degli ingressi. AND dà 1 solo quando entrambi gli ingressi valgono 1. OR dà 0 solo quando entrambi valgono 0, quindi 1 OR 1 fa 1, non 2. NOT ha un solo ingresso e lo inverte. Imparate le tre forme: dorso piatto e fronte tonda per AND, dorso curvo e fronte a punta per OR, un triangolo con un cerchietto per NOT.
+DA COMPRENDERE OGGI: le porte logiche.
 Per il docente: AND vale 1 solo quando entrambi gli ingressi valgono 1; OR vale 0 solo quando entrambi valgono 0; NOT inverte. Una tabella di verità elenca l'uscita per ogni combinazione degli ingressi.</a:t>
             </a:r>
             <a:endParaRPr lang="en-US" dirty="0"/>
@@ -3305,6 +3321,420 @@
       </p:pic>
       <p:sp>
         <p:nvSpPr>
+          <p:cNvPr id="15" name="Shape 12"/>
+          <p:cNvSpPr/>
+          <p:nvPr/>
+        </p:nvSpPr>
+        <p:spPr>
+          <a:xfrm>
+            <a:off x="8910777" y="91440"/>
+            <a:ext cx="2732278" cy="274320"/>
+          </a:xfrm>
+          <a:prstGeom prst="rect">
+            <a:avLst/>
+          </a:prstGeom>
+          <a:solidFill>
+            <a:srgbClr val="F3E8FF"/>
+          </a:solidFill>
+          <a:ln w="12700">
+            <a:solidFill>
+              <a:srgbClr val="7E22CE"/>
+            </a:solidFill>
+            <a:prstDash val="dash"/>
+          </a:ln>
+        </p:spPr>
+      </p:sp>
+      <p:sp>
+        <p:nvSpPr>
+          <p:cNvPr id="16" name="Shape 13"/>
+          <p:cNvSpPr/>
+          <p:nvPr/>
+        </p:nvSpPr>
+        <p:spPr>
+          <a:xfrm>
+            <a:off x="8938209" y="128016"/>
+            <a:ext cx="45720" cy="45720"/>
+          </a:xfrm>
+          <a:prstGeom prst="rect">
+            <a:avLst/>
+          </a:prstGeom>
+          <a:solidFill>
+            <a:srgbClr val="7E22CE"/>
+          </a:solidFill>
+          <a:ln w="12700">
+            <a:solidFill>
+              <a:srgbClr val="7E22CE"/>
+            </a:solidFill>
+            <a:prstDash val="solid"/>
+          </a:ln>
+        </p:spPr>
+      </p:sp>
+      <p:sp>
+        <p:nvSpPr>
+          <p:cNvPr id="17" name="Shape 14"/>
+          <p:cNvSpPr/>
+          <p:nvPr/>
+        </p:nvSpPr>
+        <p:spPr>
+          <a:xfrm>
+            <a:off x="8938209" y="205740"/>
+            <a:ext cx="45720" cy="45720"/>
+          </a:xfrm>
+          <a:prstGeom prst="rect">
+            <a:avLst/>
+          </a:prstGeom>
+          <a:solidFill>
+            <a:srgbClr val="7E22CE"/>
+          </a:solidFill>
+          <a:ln w="12700">
+            <a:solidFill>
+              <a:srgbClr val="7E22CE"/>
+            </a:solidFill>
+            <a:prstDash val="solid"/>
+          </a:ln>
+        </p:spPr>
+      </p:sp>
+      <p:sp>
+        <p:nvSpPr>
+          <p:cNvPr id="18" name="Shape 15"/>
+          <p:cNvSpPr/>
+          <p:nvPr/>
+        </p:nvSpPr>
+        <p:spPr>
+          <a:xfrm>
+            <a:off x="8938209" y="283464"/>
+            <a:ext cx="45720" cy="45720"/>
+          </a:xfrm>
+          <a:prstGeom prst="rect">
+            <a:avLst/>
+          </a:prstGeom>
+          <a:solidFill>
+            <a:srgbClr val="7E22CE"/>
+          </a:solidFill>
+          <a:ln w="12700">
+            <a:solidFill>
+              <a:srgbClr val="7E22CE"/>
+            </a:solidFill>
+            <a:prstDash val="solid"/>
+          </a:ln>
+        </p:spPr>
+      </p:sp>
+      <p:pic>
+        <p:nvPicPr>
+          <p:cNvPr id="19" name="Image 1" descr="preencoded.png">    </p:cNvPr>
+          <p:cNvPicPr>
+            <a:picLocks noChangeAspect="1"/>
+          </p:cNvPicPr>
+          <p:nvPr/>
+        </p:nvPicPr>
+        <p:blipFill>
+          <a:blip r:embed="rId2"/>
+          <a:stretch>
+            <a:fillRect/>
+          </a:stretch>
+        </p:blipFill>
+        <p:spPr>
+          <a:xfrm>
+            <a:off x="9038793" y="128016"/>
+            <a:ext cx="201168" cy="201168"/>
+          </a:xfrm>
+          <a:prstGeom prst="rect">
+            <a:avLst/>
+          </a:prstGeom>
+        </p:spPr>
+      </p:pic>
+      <p:sp>
+        <p:nvSpPr>
+          <p:cNvPr id="20" name="Text 16"/>
+          <p:cNvSpPr txBox="1"/>
+          <p:nvPr/>
+        </p:nvSpPr>
+        <p:spPr>
+          <a:xfrm>
+            <a:off x="9294825" y="91440"/>
+            <a:ext cx="2311654" cy="274320"/>
+          </a:xfrm>
+          <a:prstGeom prst="rect">
+            <a:avLst/>
+          </a:prstGeom>
+          <a:noFill/>
+          <a:ln/>
+        </p:spPr>
+        <p:txBody>
+          <a:bodyPr wrap="square" lIns="0" tIns="0" rIns="0" bIns="0" rtlCol="0" anchor="ctr"/>
+          <a:lstStyle/>
+          <a:p>
+            <a:pPr indent="0" marL="0">
+              <a:buNone/>
+            </a:pPr>
+            <a:r>
+              <a:rPr lang="en-US" sz="1100" b="1" dirty="0">
+                <a:solidFill>
+                  <a:srgbClr val="6B21A8"/>
+                </a:solidFill>
+                <a:latin typeface="Calibri" pitchFamily="34" charset="0"/>
+                <a:ea typeface="Calibri" pitchFamily="34" charset="-122"/>
+                <a:cs typeface="Calibri" pitchFamily="34" charset="-120"/>
+              </a:rPr>
+              <a:t>DA COMPRENDERE PIÙ AVANTI</a:t>
+            </a:r>
+            <a:endParaRPr lang="en-US" sz="1100" dirty="0"/>
+          </a:p>
+        </p:txBody>
+      </p:sp>
+      <p:sp>
+        <p:nvSpPr>
+          <p:cNvPr id="21" name="Shape 17"/>
+          <p:cNvSpPr/>
+          <p:nvPr/>
+        </p:nvSpPr>
+        <p:spPr>
+          <a:xfrm>
+            <a:off x="6675069" y="91440"/>
+            <a:ext cx="2125980" cy="274320"/>
+          </a:xfrm>
+          <a:prstGeom prst="rect">
+            <a:avLst/>
+          </a:prstGeom>
+          <a:solidFill>
+            <a:srgbClr val="FEF3C7"/>
+          </a:solidFill>
+          <a:ln w="12700">
+            <a:solidFill>
+              <a:srgbClr val="B45309"/>
+            </a:solidFill>
+            <a:prstDash val="solid"/>
+          </a:ln>
+        </p:spPr>
+      </p:sp>
+      <p:sp>
+        <p:nvSpPr>
+          <p:cNvPr id="22" name="Shape 18"/>
+          <p:cNvSpPr/>
+          <p:nvPr/>
+        </p:nvSpPr>
+        <p:spPr>
+          <a:xfrm>
+            <a:off x="6675069" y="91440"/>
+            <a:ext cx="27432" cy="274320"/>
+          </a:xfrm>
+          <a:prstGeom prst="rect">
+            <a:avLst/>
+          </a:prstGeom>
+          <a:solidFill>
+            <a:srgbClr val="B45309"/>
+          </a:solidFill>
+          <a:ln w="12700">
+            <a:solidFill>
+              <a:srgbClr val="B45309"/>
+            </a:solidFill>
+            <a:prstDash val="solid"/>
+          </a:ln>
+        </p:spPr>
+      </p:sp>
+      <p:sp>
+        <p:nvSpPr>
+          <p:cNvPr id="23" name="Shape 19"/>
+          <p:cNvSpPr/>
+          <p:nvPr/>
+        </p:nvSpPr>
+        <p:spPr>
+          <a:xfrm>
+            <a:off x="6729933" y="91440"/>
+            <a:ext cx="27432" cy="274320"/>
+          </a:xfrm>
+          <a:prstGeom prst="rect">
+            <a:avLst/>
+          </a:prstGeom>
+          <a:solidFill>
+            <a:srgbClr val="B45309"/>
+          </a:solidFill>
+          <a:ln w="12700">
+            <a:solidFill>
+              <a:srgbClr val="B45309"/>
+            </a:solidFill>
+            <a:prstDash val="solid"/>
+          </a:ln>
+        </p:spPr>
+      </p:sp>
+      <p:pic>
+        <p:nvPicPr>
+          <p:cNvPr id="24" name="Image 2" descr="preencoded.png">    </p:cNvPr>
+          <p:cNvPicPr>
+            <a:picLocks noChangeAspect="1"/>
+          </p:cNvPicPr>
+          <p:nvPr/>
+        </p:nvPicPr>
+        <p:blipFill>
+          <a:blip r:embed="rId3"/>
+          <a:stretch>
+            <a:fillRect/>
+          </a:stretch>
+        </p:blipFill>
+        <p:spPr>
+          <a:xfrm>
+            <a:off x="6803085" y="128016"/>
+            <a:ext cx="201168" cy="201168"/>
+          </a:xfrm>
+          <a:prstGeom prst="rect">
+            <a:avLst/>
+          </a:prstGeom>
+        </p:spPr>
+      </p:pic>
+      <p:sp>
+        <p:nvSpPr>
+          <p:cNvPr id="25" name="Text 20"/>
+          <p:cNvSpPr txBox="1"/>
+          <p:nvPr/>
+        </p:nvSpPr>
+        <p:spPr>
+          <a:xfrm>
+            <a:off x="7059117" y="91440"/>
+            <a:ext cx="1705356" cy="274320"/>
+          </a:xfrm>
+          <a:prstGeom prst="rect">
+            <a:avLst/>
+          </a:prstGeom>
+          <a:noFill/>
+          <a:ln/>
+        </p:spPr>
+        <p:txBody>
+          <a:bodyPr wrap="square" lIns="0" tIns="0" rIns="0" bIns="0" rtlCol="0" anchor="ctr"/>
+          <a:lstStyle/>
+          <a:p>
+            <a:pPr indent="0" marL="0">
+              <a:buNone/>
+            </a:pPr>
+            <a:r>
+              <a:rPr lang="en-US" sz="1100" b="1" dirty="0">
+                <a:solidFill>
+                  <a:srgbClr val="92400E"/>
+                </a:solidFill>
+                <a:latin typeface="Calibri" pitchFamily="34" charset="0"/>
+                <a:ea typeface="Calibri" pitchFamily="34" charset="-122"/>
+                <a:cs typeface="Calibri" pitchFamily="34" charset="-120"/>
+              </a:rPr>
+              <a:t>DA UTILIZZARE OGGI</a:t>
+            </a:r>
+            <a:endParaRPr lang="en-US" sz="1100" dirty="0"/>
+          </a:p>
+        </p:txBody>
+      </p:sp>
+      <p:sp>
+        <p:nvSpPr>
+          <p:cNvPr id="26" name="Shape 21"/>
+          <p:cNvSpPr/>
+          <p:nvPr/>
+        </p:nvSpPr>
+        <p:spPr>
+          <a:xfrm>
+            <a:off x="4352747" y="91440"/>
+            <a:ext cx="2212594" cy="274320"/>
+          </a:xfrm>
+          <a:prstGeom prst="rect">
+            <a:avLst/>
+          </a:prstGeom>
+          <a:solidFill>
+            <a:srgbClr val="E0F2FE"/>
+          </a:solidFill>
+          <a:ln w="12700">
+            <a:solidFill>
+              <a:srgbClr val="0369A1"/>
+            </a:solidFill>
+            <a:prstDash val="solid"/>
+          </a:ln>
+        </p:spPr>
+      </p:sp>
+      <p:sp>
+        <p:nvSpPr>
+          <p:cNvPr id="27" name="Shape 22"/>
+          <p:cNvSpPr/>
+          <p:nvPr/>
+        </p:nvSpPr>
+        <p:spPr>
+          <a:xfrm>
+            <a:off x="4352747" y="91440"/>
+            <a:ext cx="73152" cy="274320"/>
+          </a:xfrm>
+          <a:prstGeom prst="rect">
+            <a:avLst/>
+          </a:prstGeom>
+          <a:solidFill>
+            <a:srgbClr val="0369A1"/>
+          </a:solidFill>
+          <a:ln w="12700">
+            <a:solidFill>
+              <a:srgbClr val="0369A1"/>
+            </a:solidFill>
+            <a:prstDash val="solid"/>
+          </a:ln>
+        </p:spPr>
+      </p:sp>
+      <p:pic>
+        <p:nvPicPr>
+          <p:cNvPr id="28" name="Image 3" descr="preencoded.png">    </p:cNvPr>
+          <p:cNvPicPr>
+            <a:picLocks noChangeAspect="1"/>
+          </p:cNvPicPr>
+          <p:nvPr/>
+        </p:nvPicPr>
+        <p:blipFill>
+          <a:blip r:embed="rId4"/>
+          <a:stretch>
+            <a:fillRect/>
+          </a:stretch>
+        </p:blipFill>
+        <p:spPr>
+          <a:xfrm>
+            <a:off x="4480763" y="128016"/>
+            <a:ext cx="201168" cy="201168"/>
+          </a:xfrm>
+          <a:prstGeom prst="rect">
+            <a:avLst/>
+          </a:prstGeom>
+        </p:spPr>
+      </p:pic>
+      <p:sp>
+        <p:nvSpPr>
+          <p:cNvPr id="29" name="Text 23"/>
+          <p:cNvSpPr txBox="1"/>
+          <p:nvPr/>
+        </p:nvSpPr>
+        <p:spPr>
+          <a:xfrm>
+            <a:off x="4736795" y="91440"/>
+            <a:ext cx="1791970" cy="274320"/>
+          </a:xfrm>
+          <a:prstGeom prst="rect">
+            <a:avLst/>
+          </a:prstGeom>
+          <a:noFill/>
+          <a:ln/>
+        </p:spPr>
+        <p:txBody>
+          <a:bodyPr wrap="square" lIns="0" tIns="0" rIns="0" bIns="0" rtlCol="0" anchor="ctr"/>
+          <a:lstStyle/>
+          <a:p>
+            <a:pPr indent="0" marL="0">
+              <a:buNone/>
+            </a:pPr>
+            <a:r>
+              <a:rPr lang="en-US" sz="1100" b="1" dirty="0">
+                <a:solidFill>
+                  <a:srgbClr val="075985"/>
+                </a:solidFill>
+                <a:latin typeface="Calibri" pitchFamily="34" charset="0"/>
+                <a:ea typeface="Calibri" pitchFamily="34" charset="-122"/>
+                <a:cs typeface="Calibri" pitchFamily="34" charset="-120"/>
+              </a:rPr>
+              <a:t>DA COMPRENDERE OGGI</a:t>
+            </a:r>
+            <a:endParaRPr lang="en-US" sz="1100" dirty="0"/>
+          </a:p>
+        </p:txBody>
+      </p:sp>
+      <p:sp>
+        <p:nvSpPr>
           <p:cNvPr id="25" name="Slide Number Placeholder 0"/>
           <p:cNvSpPr>
             <a:spLocks noGrp="1"/>
@@ -3491,9 +3921,59 @@
           </a:p>
         </p:txBody>
       </p:sp>
+      <p:sp>
+        <p:nvSpPr>
+          <p:cNvPr id="5" name="Shape 3"/>
+          <p:cNvSpPr/>
+          <p:nvPr/>
+        </p:nvSpPr>
+        <p:spPr>
+          <a:xfrm>
+            <a:off x="8182940" y="91440"/>
+            <a:ext cx="3460115" cy="274320"/>
+          </a:xfrm>
+          <a:prstGeom prst="rect">
+            <a:avLst/>
+          </a:prstGeom>
+          <a:solidFill>
+            <a:srgbClr val="E0F2FE"/>
+          </a:solidFill>
+          <a:ln w="12700">
+            <a:solidFill>
+              <a:srgbClr val="0369A1"/>
+            </a:solidFill>
+            <a:prstDash val="solid"/>
+          </a:ln>
+        </p:spPr>
+      </p:sp>
+      <p:sp>
+        <p:nvSpPr>
+          <p:cNvPr id="6" name="Shape 4"/>
+          <p:cNvSpPr/>
+          <p:nvPr/>
+        </p:nvSpPr>
+        <p:spPr>
+          <a:xfrm>
+            <a:off x="8182940" y="91440"/>
+            <a:ext cx="73152" cy="274320"/>
+          </a:xfrm>
+          <a:prstGeom prst="rect">
+            <a:avLst/>
+          </a:prstGeom>
+          <a:solidFill>
+            <a:srgbClr val="0369A1"/>
+          </a:solidFill>
+          <a:ln w="12700">
+            <a:solidFill>
+              <a:srgbClr val="0369A1"/>
+            </a:solidFill>
+            <a:prstDash val="solid"/>
+          </a:ln>
+        </p:spPr>
+      </p:sp>
       <p:pic>
         <p:nvPicPr>
-          <p:cNvPr id="6" name="Image 0" descr="preencoded.png">    </p:cNvPr>
+          <p:cNvPr id="7" name="Image 0" descr="preencoded.png">    </p:cNvPr>
           <p:cNvPicPr>
             <a:picLocks noChangeAspect="1"/>
           </p:cNvPicPr>
@@ -3507,6 +3987,83 @@
         </p:blipFill>
         <p:spPr>
           <a:xfrm>
+            <a:off x="8310956" y="128016"/>
+            <a:ext cx="201168" cy="201168"/>
+          </a:xfrm>
+          <a:prstGeom prst="rect">
+            <a:avLst/>
+          </a:prstGeom>
+        </p:spPr>
+      </p:pic>
+      <p:sp>
+        <p:nvSpPr>
+          <p:cNvPr id="8" name="Text 5"/>
+          <p:cNvSpPr txBox="1"/>
+          <p:nvPr/>
+        </p:nvSpPr>
+        <p:spPr>
+          <a:xfrm>
+            <a:off x="8566988" y="91440"/>
+            <a:ext cx="3039491" cy="274320"/>
+          </a:xfrm>
+          <a:prstGeom prst="rect">
+            <a:avLst/>
+          </a:prstGeom>
+          <a:noFill/>
+          <a:ln/>
+        </p:spPr>
+        <p:txBody>
+          <a:bodyPr wrap="square" lIns="0" tIns="0" rIns="0" bIns="0" rtlCol="0" anchor="ctr"/>
+          <a:lstStyle/>
+          <a:p>
+            <a:pPr indent="0" marL="0">
+              <a:buNone/>
+            </a:pPr>
+            <a:r>
+              <a:rPr lang="en-US" sz="1100" b="1" dirty="0">
+                <a:solidFill>
+                  <a:srgbClr val="075985"/>
+                </a:solidFill>
+                <a:latin typeface="Calibri" pitchFamily="34" charset="0"/>
+                <a:ea typeface="Calibri" pitchFamily="34" charset="-122"/>
+                <a:cs typeface="Calibri" pitchFamily="34" charset="-120"/>
+              </a:rPr>
+              <a:t>DA COMPRENDERE OGGI</a:t>
+            </a:r>
+            <a:pPr indent="0" marL="0">
+              <a:buNone/>
+            </a:pPr>
+            <a:r>
+              <a:rPr lang="en-US" sz="1100" dirty="0">
+                <a:solidFill>
+                  <a:srgbClr val="075985"/>
+                </a:solidFill>
+                <a:latin typeface="Calibri" pitchFamily="34" charset="0"/>
+                <a:ea typeface="Calibri" pitchFamily="34" charset="-122"/>
+                <a:cs typeface="Calibri" pitchFamily="34" charset="-120"/>
+              </a:rPr>
+              <a:t> · le porte logiche</a:t>
+            </a:r>
+            <a:endParaRPr lang="en-US" sz="1100" dirty="0"/>
+          </a:p>
+        </p:txBody>
+      </p:sp>
+      <p:pic>
+        <p:nvPicPr>
+          <p:cNvPr id="10" name="Image 1" descr="preencoded.png">    </p:cNvPr>
+          <p:cNvPicPr>
+            <a:picLocks noChangeAspect="1"/>
+          </p:cNvPicPr>
+          <p:nvPr/>
+        </p:nvPicPr>
+        <p:blipFill>
+          <a:blip r:embed="rId2"/>
+          <a:stretch>
+            <a:fillRect/>
+          </a:stretch>
+        </p:blipFill>
+        <p:spPr>
+          <a:xfrm>
             <a:off x="822960" y="2236278"/>
             <a:ext cx="2966618" cy="830964"/>
           </a:xfrm>
@@ -3517,7 +4074,7 @@
       </p:pic>
       <p:sp>
         <p:nvSpPr>
-          <p:cNvPr id="7" name="Text 3"/>
+          <p:cNvPr id="11" name="Text 6"/>
           <p:cNvSpPr txBox="1"/>
           <p:nvPr/>
         </p:nvSpPr>
@@ -4617,7 +5174,7 @@
       </p:graphicFrame>
       <p:sp>
         <p:nvSpPr>
-          <p:cNvPr id="9" name="Shape 4"/>
+          <p:cNvPr id="13" name="Shape 7"/>
           <p:cNvSpPr/>
           <p:nvPr/>
         </p:nvSpPr>
@@ -4644,7 +5201,7 @@
       </p:sp>
       <p:sp>
         <p:nvSpPr>
-          <p:cNvPr id="10" name="Text 5"/>
+          <p:cNvPr id="14" name="Text 8"/>
           <p:cNvSpPr txBox="1"/>
           <p:nvPr/>
         </p:nvSpPr>
@@ -4691,14 +5248,14 @@
       </p:sp>
       <p:pic>
         <p:nvPicPr>
-          <p:cNvPr id="11" name="Image 1" descr="preencoded.png">    </p:cNvPr>
+          <p:cNvPr id="15" name="Image 2" descr="preencoded.png">    </p:cNvPr>
           <p:cNvPicPr>
             <a:picLocks noChangeAspect="1"/>
           </p:cNvPicPr>
           <p:nvPr/>
         </p:nvPicPr>
         <p:blipFill>
-          <a:blip r:embed="rId2"/>
+          <a:blip r:embed="rId3"/>
           <a:stretch>
             <a:fillRect/>
           </a:stretch>
@@ -4715,7 +5272,7 @@
       </p:pic>
       <p:sp>
         <p:nvSpPr>
-          <p:cNvPr id="12" name="Text 6"/>
+          <p:cNvPr id="16" name="Text 9"/>
           <p:cNvSpPr txBox="1"/>
           <p:nvPr/>
         </p:nvSpPr>
@@ -5815,7 +6372,7 @@
       </p:graphicFrame>
       <p:sp>
         <p:nvSpPr>
-          <p:cNvPr id="14" name="Shape 7"/>
+          <p:cNvPr id="18" name="Shape 10"/>
           <p:cNvSpPr/>
           <p:nvPr/>
         </p:nvSpPr>
@@ -5842,7 +6399,7 @@
       </p:sp>
       <p:sp>
         <p:nvSpPr>
-          <p:cNvPr id="15" name="Text 8"/>
+          <p:cNvPr id="19" name="Text 11"/>
           <p:cNvSpPr txBox="1"/>
           <p:nvPr/>
         </p:nvSpPr>
@@ -5889,14 +6446,14 @@
       </p:sp>
       <p:pic>
         <p:nvPicPr>
-          <p:cNvPr id="16" name="Image 2" descr="preencoded.png">    </p:cNvPr>
+          <p:cNvPr id="20" name="Image 3" descr="preencoded.png">    </p:cNvPr>
           <p:cNvPicPr>
             <a:picLocks noChangeAspect="1"/>
           </p:cNvPicPr>
           <p:nvPr/>
         </p:nvPicPr>
         <p:blipFill>
-          <a:blip r:embed="rId3"/>
+          <a:blip r:embed="rId4"/>
           <a:stretch>
             <a:fillRect/>
           </a:stretch>
@@ -5913,7 +6470,7 @@
       </p:pic>
       <p:sp>
         <p:nvSpPr>
-          <p:cNvPr id="17" name="Text 9"/>
+          <p:cNvPr id="21" name="Text 12"/>
           <p:cNvSpPr txBox="1"/>
           <p:nvPr/>
         </p:nvSpPr>
@@ -8227,6 +8784,133 @@
       </p:sp>
       <p:sp>
         <p:nvSpPr>
+          <p:cNvPr id="5" name="Shape 2"/>
+          <p:cNvSpPr/>
+          <p:nvPr/>
+        </p:nvSpPr>
+        <p:spPr>
+          <a:xfrm>
+            <a:off x="8051622" y="91440"/>
+            <a:ext cx="3591433" cy="274320"/>
+          </a:xfrm>
+          <a:prstGeom prst="rect">
+            <a:avLst/>
+          </a:prstGeom>
+          <a:solidFill>
+            <a:srgbClr val="E0F2FE"/>
+          </a:solidFill>
+          <a:ln w="12700">
+            <a:solidFill>
+              <a:srgbClr val="0369A1"/>
+            </a:solidFill>
+            <a:prstDash val="solid"/>
+          </a:ln>
+        </p:spPr>
+      </p:sp>
+      <p:sp>
+        <p:nvSpPr>
+          <p:cNvPr id="6" name="Shape 3"/>
+          <p:cNvSpPr/>
+          <p:nvPr/>
+        </p:nvSpPr>
+        <p:spPr>
+          <a:xfrm>
+            <a:off x="8051622" y="91440"/>
+            <a:ext cx="73152" cy="274320"/>
+          </a:xfrm>
+          <a:prstGeom prst="rect">
+            <a:avLst/>
+          </a:prstGeom>
+          <a:solidFill>
+            <a:srgbClr val="0369A1"/>
+          </a:solidFill>
+          <a:ln w="12700">
+            <a:solidFill>
+              <a:srgbClr val="0369A1"/>
+            </a:solidFill>
+            <a:prstDash val="solid"/>
+          </a:ln>
+        </p:spPr>
+      </p:sp>
+      <p:pic>
+        <p:nvPicPr>
+          <p:cNvPr id="7" name="Image 0" descr="preencoded.png">    </p:cNvPr>
+          <p:cNvPicPr>
+            <a:picLocks noChangeAspect="1"/>
+          </p:cNvPicPr>
+          <p:nvPr/>
+        </p:nvPicPr>
+        <p:blipFill>
+          <a:blip r:embed="rId1"/>
+          <a:stretch>
+            <a:fillRect/>
+          </a:stretch>
+        </p:blipFill>
+        <p:spPr>
+          <a:xfrm>
+            <a:off x="8179638" y="128016"/>
+            <a:ext cx="201168" cy="201168"/>
+          </a:xfrm>
+          <a:prstGeom prst="rect">
+            <a:avLst/>
+          </a:prstGeom>
+        </p:spPr>
+      </p:pic>
+      <p:sp>
+        <p:nvSpPr>
+          <p:cNvPr id="8" name="Text 4"/>
+          <p:cNvSpPr txBox="1"/>
+          <p:nvPr/>
+        </p:nvSpPr>
+        <p:spPr>
+          <a:xfrm>
+            <a:off x="8435670" y="91440"/>
+            <a:ext cx="3170809" cy="274320"/>
+          </a:xfrm>
+          <a:prstGeom prst="rect">
+            <a:avLst/>
+          </a:prstGeom>
+          <a:noFill/>
+          <a:ln/>
+        </p:spPr>
+        <p:txBody>
+          <a:bodyPr wrap="square" lIns="0" tIns="0" rIns="0" bIns="0" rtlCol="0" anchor="ctr"/>
+          <a:lstStyle/>
+          <a:p>
+            <a:pPr indent="0" marL="0">
+              <a:buNone/>
+            </a:pPr>
+            <a:r>
+              <a:rPr lang="en-US" sz="1100" b="1" dirty="0">
+                <a:solidFill>
+                  <a:srgbClr val="075985"/>
+                </a:solidFill>
+                <a:latin typeface="Calibri" pitchFamily="34" charset="0"/>
+                <a:ea typeface="Calibri" pitchFamily="34" charset="-122"/>
+                <a:cs typeface="Calibri" pitchFamily="34" charset="-120"/>
+              </a:rPr>
+              <a:t>DA COMPRENDERE OGGI</a:t>
+            </a:r>
+            <a:pPr indent="0" marL="0">
+              <a:buNone/>
+            </a:pPr>
+            <a:r>
+              <a:rPr lang="en-US" sz="1100" dirty="0">
+                <a:solidFill>
+                  <a:srgbClr val="075985"/>
+                </a:solidFill>
+                <a:latin typeface="Calibri" pitchFamily="34" charset="0"/>
+                <a:ea typeface="Calibri" pitchFamily="34" charset="-122"/>
+                <a:cs typeface="Calibri" pitchFamily="34" charset="-120"/>
+              </a:rPr>
+              <a:t> · l'algebra di Boole</a:t>
+            </a:r>
+            <a:endParaRPr lang="en-US" sz="1100" dirty="0"/>
+          </a:p>
+        </p:txBody>
+      </p:sp>
+      <p:sp>
+        <p:nvSpPr>
           <p:cNvPr id="25" name="Slide Number Placeholder 0"/>
           <p:cNvSpPr>
             <a:spLocks noGrp="1"/>
@@ -9631,6 +10315,133 @@
               <a:t>Attenzione: anche OR si distribuisce rispetto ad AND. Per somma e prodotto ordinari è falso.</a:t>
             </a:r>
             <a:endParaRPr lang="en-US" sz="1500" dirty="0"/>
+          </a:p>
+        </p:txBody>
+      </p:sp>
+      <p:sp>
+        <p:nvSpPr>
+          <p:cNvPr id="5" name="Shape 2"/>
+          <p:cNvSpPr/>
+          <p:nvPr/>
+        </p:nvSpPr>
+        <p:spPr>
+          <a:xfrm>
+            <a:off x="8051622" y="91440"/>
+            <a:ext cx="3591433" cy="274320"/>
+          </a:xfrm>
+          <a:prstGeom prst="rect">
+            <a:avLst/>
+          </a:prstGeom>
+          <a:solidFill>
+            <a:srgbClr val="E0F2FE"/>
+          </a:solidFill>
+          <a:ln w="12700">
+            <a:solidFill>
+              <a:srgbClr val="0369A1"/>
+            </a:solidFill>
+            <a:prstDash val="solid"/>
+          </a:ln>
+        </p:spPr>
+      </p:sp>
+      <p:sp>
+        <p:nvSpPr>
+          <p:cNvPr id="6" name="Shape 3"/>
+          <p:cNvSpPr/>
+          <p:nvPr/>
+        </p:nvSpPr>
+        <p:spPr>
+          <a:xfrm>
+            <a:off x="8051622" y="91440"/>
+            <a:ext cx="73152" cy="274320"/>
+          </a:xfrm>
+          <a:prstGeom prst="rect">
+            <a:avLst/>
+          </a:prstGeom>
+          <a:solidFill>
+            <a:srgbClr val="0369A1"/>
+          </a:solidFill>
+          <a:ln w="12700">
+            <a:solidFill>
+              <a:srgbClr val="0369A1"/>
+            </a:solidFill>
+            <a:prstDash val="solid"/>
+          </a:ln>
+        </p:spPr>
+      </p:sp>
+      <p:pic>
+        <p:nvPicPr>
+          <p:cNvPr id="7" name="Image 0" descr="preencoded.png">    </p:cNvPr>
+          <p:cNvPicPr>
+            <a:picLocks noChangeAspect="1"/>
+          </p:cNvPicPr>
+          <p:nvPr/>
+        </p:nvPicPr>
+        <p:blipFill>
+          <a:blip r:embed="rId1"/>
+          <a:stretch>
+            <a:fillRect/>
+          </a:stretch>
+        </p:blipFill>
+        <p:spPr>
+          <a:xfrm>
+            <a:off x="8179638" y="128016"/>
+            <a:ext cx="201168" cy="201168"/>
+          </a:xfrm>
+          <a:prstGeom prst="rect">
+            <a:avLst/>
+          </a:prstGeom>
+        </p:spPr>
+      </p:pic>
+      <p:sp>
+        <p:nvSpPr>
+          <p:cNvPr id="8" name="Text 4"/>
+          <p:cNvSpPr txBox="1"/>
+          <p:nvPr/>
+        </p:nvSpPr>
+        <p:spPr>
+          <a:xfrm>
+            <a:off x="8435670" y="91440"/>
+            <a:ext cx="3170809" cy="274320"/>
+          </a:xfrm>
+          <a:prstGeom prst="rect">
+            <a:avLst/>
+          </a:prstGeom>
+          <a:noFill/>
+          <a:ln/>
+        </p:spPr>
+        <p:txBody>
+          <a:bodyPr wrap="square" lIns="0" tIns="0" rIns="0" bIns="0" rtlCol="0" anchor="ctr"/>
+          <a:lstStyle/>
+          <a:p>
+            <a:pPr indent="0" marL="0">
+              <a:buNone/>
+            </a:pPr>
+            <a:r>
+              <a:rPr lang="en-US" sz="1100" b="1" dirty="0">
+                <a:solidFill>
+                  <a:srgbClr val="075985"/>
+                </a:solidFill>
+                <a:latin typeface="Calibri" pitchFamily="34" charset="0"/>
+                <a:ea typeface="Calibri" pitchFamily="34" charset="-122"/>
+                <a:cs typeface="Calibri" pitchFamily="34" charset="-120"/>
+              </a:rPr>
+              <a:t>DA COMPRENDERE OGGI</a:t>
+            </a:r>
+            <a:pPr indent="0" marL="0">
+              <a:buNone/>
+            </a:pPr>
+            <a:r>
+              <a:rPr lang="en-US" sz="1100" dirty="0">
+                <a:solidFill>
+                  <a:srgbClr val="075985"/>
+                </a:solidFill>
+                <a:latin typeface="Calibri" pitchFamily="34" charset="0"/>
+                <a:ea typeface="Calibri" pitchFamily="34" charset="-122"/>
+                <a:cs typeface="Calibri" pitchFamily="34" charset="-120"/>
+              </a:rPr>
+              <a:t> · l'algebra di Boole</a:t>
+            </a:r>
+            <a:endParaRPr lang="en-US" sz="1100" dirty="0"/>
           </a:p>
         </p:txBody>
       </p:sp>
@@ -12547,6 +13358,133 @@
       </p:sp>
       <p:sp>
         <p:nvSpPr>
+          <p:cNvPr id="15" name="Shape 12"/>
+          <p:cNvSpPr/>
+          <p:nvPr/>
+        </p:nvSpPr>
+        <p:spPr>
+          <a:xfrm>
+            <a:off x="8051622" y="91440"/>
+            <a:ext cx="3591433" cy="274320"/>
+          </a:xfrm>
+          <a:prstGeom prst="rect">
+            <a:avLst/>
+          </a:prstGeom>
+          <a:solidFill>
+            <a:srgbClr val="E0F2FE"/>
+          </a:solidFill>
+          <a:ln w="12700">
+            <a:solidFill>
+              <a:srgbClr val="0369A1"/>
+            </a:solidFill>
+            <a:prstDash val="solid"/>
+          </a:ln>
+        </p:spPr>
+      </p:sp>
+      <p:sp>
+        <p:nvSpPr>
+          <p:cNvPr id="16" name="Shape 13"/>
+          <p:cNvSpPr/>
+          <p:nvPr/>
+        </p:nvSpPr>
+        <p:spPr>
+          <a:xfrm>
+            <a:off x="8051622" y="91440"/>
+            <a:ext cx="73152" cy="274320"/>
+          </a:xfrm>
+          <a:prstGeom prst="rect">
+            <a:avLst/>
+          </a:prstGeom>
+          <a:solidFill>
+            <a:srgbClr val="0369A1"/>
+          </a:solidFill>
+          <a:ln w="12700">
+            <a:solidFill>
+              <a:srgbClr val="0369A1"/>
+            </a:solidFill>
+            <a:prstDash val="solid"/>
+          </a:ln>
+        </p:spPr>
+      </p:sp>
+      <p:pic>
+        <p:nvPicPr>
+          <p:cNvPr id="17" name="Image 0" descr="preencoded.png">    </p:cNvPr>
+          <p:cNvPicPr>
+            <a:picLocks noChangeAspect="1"/>
+          </p:cNvPicPr>
+          <p:nvPr/>
+        </p:nvPicPr>
+        <p:blipFill>
+          <a:blip r:embed="rId1"/>
+          <a:stretch>
+            <a:fillRect/>
+          </a:stretch>
+        </p:blipFill>
+        <p:spPr>
+          <a:xfrm>
+            <a:off x="8179638" y="128016"/>
+            <a:ext cx="201168" cy="201168"/>
+          </a:xfrm>
+          <a:prstGeom prst="rect">
+            <a:avLst/>
+          </a:prstGeom>
+        </p:spPr>
+      </p:pic>
+      <p:sp>
+        <p:nvSpPr>
+          <p:cNvPr id="18" name="Text 14"/>
+          <p:cNvSpPr txBox="1"/>
+          <p:nvPr/>
+        </p:nvSpPr>
+        <p:spPr>
+          <a:xfrm>
+            <a:off x="8435670" y="91440"/>
+            <a:ext cx="3170809" cy="274320"/>
+          </a:xfrm>
+          <a:prstGeom prst="rect">
+            <a:avLst/>
+          </a:prstGeom>
+          <a:noFill/>
+          <a:ln/>
+        </p:spPr>
+        <p:txBody>
+          <a:bodyPr wrap="square" lIns="0" tIns="0" rIns="0" bIns="0" rtlCol="0" anchor="ctr"/>
+          <a:lstStyle/>
+          <a:p>
+            <a:pPr indent="0" marL="0">
+              <a:buNone/>
+            </a:pPr>
+            <a:r>
+              <a:rPr lang="en-US" sz="1100" b="1" dirty="0">
+                <a:solidFill>
+                  <a:srgbClr val="075985"/>
+                </a:solidFill>
+                <a:latin typeface="Calibri" pitchFamily="34" charset="0"/>
+                <a:ea typeface="Calibri" pitchFamily="34" charset="-122"/>
+                <a:cs typeface="Calibri" pitchFamily="34" charset="-120"/>
+              </a:rPr>
+              <a:t>DA COMPRENDERE OGGI</a:t>
+            </a:r>
+            <a:pPr indent="0" marL="0">
+              <a:buNone/>
+            </a:pPr>
+            <a:r>
+              <a:rPr lang="en-US" sz="1100" dirty="0">
+                <a:solidFill>
+                  <a:srgbClr val="075985"/>
+                </a:solidFill>
+                <a:latin typeface="Calibri" pitchFamily="34" charset="0"/>
+                <a:ea typeface="Calibri" pitchFamily="34" charset="-122"/>
+                <a:cs typeface="Calibri" pitchFamily="34" charset="-120"/>
+              </a:rPr>
+              <a:t> · l'algebra di Boole</a:t>
+            </a:r>
+            <a:endParaRPr lang="en-US" sz="1100" dirty="0"/>
+          </a:p>
+        </p:txBody>
+      </p:sp>
+      <p:sp>
+        <p:nvSpPr>
           <p:cNvPr id="25" name="Slide Number Placeholder 0"/>
           <p:cNvSpPr>
             <a:spLocks noGrp="1"/>
@@ -12964,6 +13902,133 @@
               <a:t>Due espressioni sono equivalenti se hanno la stessa tabella di verità</a:t>
             </a:r>
             <a:endParaRPr lang="en-US" sz="2400" dirty="0"/>
+          </a:p>
+        </p:txBody>
+      </p:sp>
+      <p:sp>
+        <p:nvSpPr>
+          <p:cNvPr id="11" name="Shape 9"/>
+          <p:cNvSpPr/>
+          <p:nvPr/>
+        </p:nvSpPr>
+        <p:spPr>
+          <a:xfrm>
+            <a:off x="8051622" y="91440"/>
+            <a:ext cx="3591433" cy="274320"/>
+          </a:xfrm>
+          <a:prstGeom prst="rect">
+            <a:avLst/>
+          </a:prstGeom>
+          <a:solidFill>
+            <a:srgbClr val="E0F2FE"/>
+          </a:solidFill>
+          <a:ln w="12700">
+            <a:solidFill>
+              <a:srgbClr val="0369A1"/>
+            </a:solidFill>
+            <a:prstDash val="solid"/>
+          </a:ln>
+        </p:spPr>
+      </p:sp>
+      <p:sp>
+        <p:nvSpPr>
+          <p:cNvPr id="12" name="Shape 10"/>
+          <p:cNvSpPr/>
+          <p:nvPr/>
+        </p:nvSpPr>
+        <p:spPr>
+          <a:xfrm>
+            <a:off x="8051622" y="91440"/>
+            <a:ext cx="73152" cy="274320"/>
+          </a:xfrm>
+          <a:prstGeom prst="rect">
+            <a:avLst/>
+          </a:prstGeom>
+          <a:solidFill>
+            <a:srgbClr val="0369A1"/>
+          </a:solidFill>
+          <a:ln w="12700">
+            <a:solidFill>
+              <a:srgbClr val="0369A1"/>
+            </a:solidFill>
+            <a:prstDash val="solid"/>
+          </a:ln>
+        </p:spPr>
+      </p:sp>
+      <p:pic>
+        <p:nvPicPr>
+          <p:cNvPr id="13" name="Image 0" descr="preencoded.png">    </p:cNvPr>
+          <p:cNvPicPr>
+            <a:picLocks noChangeAspect="1"/>
+          </p:cNvPicPr>
+          <p:nvPr/>
+        </p:nvPicPr>
+        <p:blipFill>
+          <a:blip r:embed="rId1"/>
+          <a:stretch>
+            <a:fillRect/>
+          </a:stretch>
+        </p:blipFill>
+        <p:spPr>
+          <a:xfrm>
+            <a:off x="8179638" y="128016"/>
+            <a:ext cx="201168" cy="201168"/>
+          </a:xfrm>
+          <a:prstGeom prst="rect">
+            <a:avLst/>
+          </a:prstGeom>
+        </p:spPr>
+      </p:pic>
+      <p:sp>
+        <p:nvSpPr>
+          <p:cNvPr id="14" name="Text 11"/>
+          <p:cNvSpPr txBox="1"/>
+          <p:nvPr/>
+        </p:nvSpPr>
+        <p:spPr>
+          <a:xfrm>
+            <a:off x="8435670" y="91440"/>
+            <a:ext cx="3170809" cy="274320"/>
+          </a:xfrm>
+          <a:prstGeom prst="rect">
+            <a:avLst/>
+          </a:prstGeom>
+          <a:noFill/>
+          <a:ln/>
+        </p:spPr>
+        <p:txBody>
+          <a:bodyPr wrap="square" lIns="0" tIns="0" rIns="0" bIns="0" rtlCol="0" anchor="ctr"/>
+          <a:lstStyle/>
+          <a:p>
+            <a:pPr indent="0" marL="0">
+              <a:buNone/>
+            </a:pPr>
+            <a:r>
+              <a:rPr lang="en-US" sz="1100" b="1" dirty="0">
+                <a:solidFill>
+                  <a:srgbClr val="075985"/>
+                </a:solidFill>
+                <a:latin typeface="Calibri" pitchFamily="34" charset="0"/>
+                <a:ea typeface="Calibri" pitchFamily="34" charset="-122"/>
+                <a:cs typeface="Calibri" pitchFamily="34" charset="-120"/>
+              </a:rPr>
+              <a:t>DA COMPRENDERE OGGI</a:t>
+            </a:r>
+            <a:pPr indent="0" marL="0">
+              <a:buNone/>
+            </a:pPr>
+            <a:r>
+              <a:rPr lang="en-US" sz="1100" dirty="0">
+                <a:solidFill>
+                  <a:srgbClr val="075985"/>
+                </a:solidFill>
+                <a:latin typeface="Calibri" pitchFamily="34" charset="0"/>
+                <a:ea typeface="Calibri" pitchFamily="34" charset="-122"/>
+                <a:cs typeface="Calibri" pitchFamily="34" charset="-120"/>
+              </a:rPr>
+              <a:t> · l'algebra di Boole</a:t>
+            </a:r>
+            <a:endParaRPr lang="en-US" sz="1100" dirty="0"/>
           </a:p>
         </p:txBody>
       </p:sp>
@@ -13837,6 +14902,133 @@
               <a:t>Allo stesso modo: x + x' . y = (x + x') . (x + y) = 1 . (x + y) = x + y</a:t>
             </a:r>
             <a:endParaRPr lang="en-US" sz="1500" dirty="0"/>
+          </a:p>
+        </p:txBody>
+      </p:sp>
+      <p:sp>
+        <p:nvSpPr>
+          <p:cNvPr id="5" name="Shape 2"/>
+          <p:cNvSpPr/>
+          <p:nvPr/>
+        </p:nvSpPr>
+        <p:spPr>
+          <a:xfrm>
+            <a:off x="8051622" y="91440"/>
+            <a:ext cx="3591433" cy="274320"/>
+          </a:xfrm>
+          <a:prstGeom prst="rect">
+            <a:avLst/>
+          </a:prstGeom>
+          <a:solidFill>
+            <a:srgbClr val="E0F2FE"/>
+          </a:solidFill>
+          <a:ln w="12700">
+            <a:solidFill>
+              <a:srgbClr val="0369A1"/>
+            </a:solidFill>
+            <a:prstDash val="solid"/>
+          </a:ln>
+        </p:spPr>
+      </p:sp>
+      <p:sp>
+        <p:nvSpPr>
+          <p:cNvPr id="6" name="Shape 3"/>
+          <p:cNvSpPr/>
+          <p:nvPr/>
+        </p:nvSpPr>
+        <p:spPr>
+          <a:xfrm>
+            <a:off x="8051622" y="91440"/>
+            <a:ext cx="73152" cy="274320"/>
+          </a:xfrm>
+          <a:prstGeom prst="rect">
+            <a:avLst/>
+          </a:prstGeom>
+          <a:solidFill>
+            <a:srgbClr val="0369A1"/>
+          </a:solidFill>
+          <a:ln w="12700">
+            <a:solidFill>
+              <a:srgbClr val="0369A1"/>
+            </a:solidFill>
+            <a:prstDash val="solid"/>
+          </a:ln>
+        </p:spPr>
+      </p:sp>
+      <p:pic>
+        <p:nvPicPr>
+          <p:cNvPr id="7" name="Image 0" descr="preencoded.png">    </p:cNvPr>
+          <p:cNvPicPr>
+            <a:picLocks noChangeAspect="1"/>
+          </p:cNvPicPr>
+          <p:nvPr/>
+        </p:nvPicPr>
+        <p:blipFill>
+          <a:blip r:embed="rId1"/>
+          <a:stretch>
+            <a:fillRect/>
+          </a:stretch>
+        </p:blipFill>
+        <p:spPr>
+          <a:xfrm>
+            <a:off x="8179638" y="128016"/>
+            <a:ext cx="201168" cy="201168"/>
+          </a:xfrm>
+          <a:prstGeom prst="rect">
+            <a:avLst/>
+          </a:prstGeom>
+        </p:spPr>
+      </p:pic>
+      <p:sp>
+        <p:nvSpPr>
+          <p:cNvPr id="8" name="Text 4"/>
+          <p:cNvSpPr txBox="1"/>
+          <p:nvPr/>
+        </p:nvSpPr>
+        <p:spPr>
+          <a:xfrm>
+            <a:off x="8435670" y="91440"/>
+            <a:ext cx="3170809" cy="274320"/>
+          </a:xfrm>
+          <a:prstGeom prst="rect">
+            <a:avLst/>
+          </a:prstGeom>
+          <a:noFill/>
+          <a:ln/>
+        </p:spPr>
+        <p:txBody>
+          <a:bodyPr wrap="square" lIns="0" tIns="0" rIns="0" bIns="0" rtlCol="0" anchor="ctr"/>
+          <a:lstStyle/>
+          <a:p>
+            <a:pPr indent="0" marL="0">
+              <a:buNone/>
+            </a:pPr>
+            <a:r>
+              <a:rPr lang="en-US" sz="1100" b="1" dirty="0">
+                <a:solidFill>
+                  <a:srgbClr val="075985"/>
+                </a:solidFill>
+                <a:latin typeface="Calibri" pitchFamily="34" charset="0"/>
+                <a:ea typeface="Calibri" pitchFamily="34" charset="-122"/>
+                <a:cs typeface="Calibri" pitchFamily="34" charset="-120"/>
+              </a:rPr>
+              <a:t>DA COMPRENDERE OGGI</a:t>
+            </a:r>
+            <a:pPr indent="0" marL="0">
+              <a:buNone/>
+            </a:pPr>
+            <a:r>
+              <a:rPr lang="en-US" sz="1100" dirty="0">
+                <a:solidFill>
+                  <a:srgbClr val="075985"/>
+                </a:solidFill>
+                <a:latin typeface="Calibri" pitchFamily="34" charset="0"/>
+                <a:ea typeface="Calibri" pitchFamily="34" charset="-122"/>
+                <a:cs typeface="Calibri" pitchFamily="34" charset="-120"/>
+              </a:rPr>
+              <a:t> · l'algebra di Boole</a:t>
+            </a:r>
+            <a:endParaRPr lang="en-US" sz="1100" dirty="0"/>
           </a:p>
         </p:txBody>
       </p:sp>
@@ -20028,6 +21220,133 @@
       </p:sp>
       <p:sp>
         <p:nvSpPr>
+          <p:cNvPr id="17" name="Shape 15"/>
+          <p:cNvSpPr/>
+          <p:nvPr/>
+        </p:nvSpPr>
+        <p:spPr>
+          <a:xfrm>
+            <a:off x="7329373" y="91440"/>
+            <a:ext cx="4313682" cy="274320"/>
+          </a:xfrm>
+          <a:prstGeom prst="rect">
+            <a:avLst/>
+          </a:prstGeom>
+          <a:solidFill>
+            <a:srgbClr val="E0F2FE"/>
+          </a:solidFill>
+          <a:ln w="12700">
+            <a:solidFill>
+              <a:srgbClr val="0369A1"/>
+            </a:solidFill>
+            <a:prstDash val="solid"/>
+          </a:ln>
+        </p:spPr>
+      </p:sp>
+      <p:sp>
+        <p:nvSpPr>
+          <p:cNvPr id="18" name="Shape 16"/>
+          <p:cNvSpPr/>
+          <p:nvPr/>
+        </p:nvSpPr>
+        <p:spPr>
+          <a:xfrm>
+            <a:off x="7329373" y="91440"/>
+            <a:ext cx="73152" cy="274320"/>
+          </a:xfrm>
+          <a:prstGeom prst="rect">
+            <a:avLst/>
+          </a:prstGeom>
+          <a:solidFill>
+            <a:srgbClr val="0369A1"/>
+          </a:solidFill>
+          <a:ln w="12700">
+            <a:solidFill>
+              <a:srgbClr val="0369A1"/>
+            </a:solidFill>
+            <a:prstDash val="solid"/>
+          </a:ln>
+        </p:spPr>
+      </p:sp>
+      <p:pic>
+        <p:nvPicPr>
+          <p:cNvPr id="19" name="Image 0" descr="preencoded.png">    </p:cNvPr>
+          <p:cNvPicPr>
+            <a:picLocks noChangeAspect="1"/>
+          </p:cNvPicPr>
+          <p:nvPr/>
+        </p:nvPicPr>
+        <p:blipFill>
+          <a:blip r:embed="rId1"/>
+          <a:stretch>
+            <a:fillRect/>
+          </a:stretch>
+        </p:blipFill>
+        <p:spPr>
+          <a:xfrm>
+            <a:off x="7457389" y="128016"/>
+            <a:ext cx="201168" cy="201168"/>
+          </a:xfrm>
+          <a:prstGeom prst="rect">
+            <a:avLst/>
+          </a:prstGeom>
+        </p:spPr>
+      </p:pic>
+      <p:sp>
+        <p:nvSpPr>
+          <p:cNvPr id="20" name="Text 17"/>
+          <p:cNvSpPr txBox="1"/>
+          <p:nvPr/>
+        </p:nvSpPr>
+        <p:spPr>
+          <a:xfrm>
+            <a:off x="7713421" y="91440"/>
+            <a:ext cx="3893058" cy="274320"/>
+          </a:xfrm>
+          <a:prstGeom prst="rect">
+            <a:avLst/>
+          </a:prstGeom>
+          <a:noFill/>
+          <a:ln/>
+        </p:spPr>
+        <p:txBody>
+          <a:bodyPr wrap="square" lIns="0" tIns="0" rIns="0" bIns="0" rtlCol="0" anchor="ctr"/>
+          <a:lstStyle/>
+          <a:p>
+            <a:pPr indent="0" marL="0">
+              <a:buNone/>
+            </a:pPr>
+            <a:r>
+              <a:rPr lang="en-US" sz="1100" b="1" dirty="0">
+                <a:solidFill>
+                  <a:srgbClr val="075985"/>
+                </a:solidFill>
+                <a:latin typeface="Calibri" pitchFamily="34" charset="0"/>
+                <a:ea typeface="Calibri" pitchFamily="34" charset="-122"/>
+                <a:cs typeface="Calibri" pitchFamily="34" charset="-120"/>
+              </a:rPr>
+              <a:t>DA COMPRENDERE OGGI</a:t>
+            </a:r>
+            <a:pPr indent="0" marL="0">
+              <a:buNone/>
+            </a:pPr>
+            <a:r>
+              <a:rPr lang="en-US" sz="1100" dirty="0">
+                <a:solidFill>
+                  <a:srgbClr val="075985"/>
+                </a:solidFill>
+                <a:latin typeface="Calibri" pitchFamily="34" charset="0"/>
+                <a:ea typeface="Calibri" pitchFamily="34" charset="-122"/>
+                <a:cs typeface="Calibri" pitchFamily="34" charset="-120"/>
+              </a:rPr>
+              <a:t> · l'architettura di von Neumann</a:t>
+            </a:r>
+            <a:endParaRPr lang="en-US" sz="1100" dirty="0"/>
+          </a:p>
+        </p:txBody>
+      </p:sp>
+      <p:sp>
+        <p:nvSpPr>
           <p:cNvPr id="25" name="Slide Number Placeholder 0"/>
           <p:cNvSpPr>
             <a:spLocks noGrp="1"/>
@@ -20622,6 +21941,133 @@
       </p:sp>
       <p:sp>
         <p:nvSpPr>
+          <p:cNvPr id="16" name="Shape 14"/>
+          <p:cNvSpPr/>
+          <p:nvPr/>
+        </p:nvSpPr>
+        <p:spPr>
+          <a:xfrm>
+            <a:off x="7329373" y="91440"/>
+            <a:ext cx="4313682" cy="274320"/>
+          </a:xfrm>
+          <a:prstGeom prst="rect">
+            <a:avLst/>
+          </a:prstGeom>
+          <a:solidFill>
+            <a:srgbClr val="E0F2FE"/>
+          </a:solidFill>
+          <a:ln w="12700">
+            <a:solidFill>
+              <a:srgbClr val="0369A1"/>
+            </a:solidFill>
+            <a:prstDash val="solid"/>
+          </a:ln>
+        </p:spPr>
+      </p:sp>
+      <p:sp>
+        <p:nvSpPr>
+          <p:cNvPr id="17" name="Shape 15"/>
+          <p:cNvSpPr/>
+          <p:nvPr/>
+        </p:nvSpPr>
+        <p:spPr>
+          <a:xfrm>
+            <a:off x="7329373" y="91440"/>
+            <a:ext cx="73152" cy="274320"/>
+          </a:xfrm>
+          <a:prstGeom prst="rect">
+            <a:avLst/>
+          </a:prstGeom>
+          <a:solidFill>
+            <a:srgbClr val="0369A1"/>
+          </a:solidFill>
+          <a:ln w="12700">
+            <a:solidFill>
+              <a:srgbClr val="0369A1"/>
+            </a:solidFill>
+            <a:prstDash val="solid"/>
+          </a:ln>
+        </p:spPr>
+      </p:sp>
+      <p:pic>
+        <p:nvPicPr>
+          <p:cNvPr id="18" name="Image 0" descr="preencoded.png">    </p:cNvPr>
+          <p:cNvPicPr>
+            <a:picLocks noChangeAspect="1"/>
+          </p:cNvPicPr>
+          <p:nvPr/>
+        </p:nvPicPr>
+        <p:blipFill>
+          <a:blip r:embed="rId1"/>
+          <a:stretch>
+            <a:fillRect/>
+          </a:stretch>
+        </p:blipFill>
+        <p:spPr>
+          <a:xfrm>
+            <a:off x="7457389" y="128016"/>
+            <a:ext cx="201168" cy="201168"/>
+          </a:xfrm>
+          <a:prstGeom prst="rect">
+            <a:avLst/>
+          </a:prstGeom>
+        </p:spPr>
+      </p:pic>
+      <p:sp>
+        <p:nvSpPr>
+          <p:cNvPr id="19" name="Text 16"/>
+          <p:cNvSpPr txBox="1"/>
+          <p:nvPr/>
+        </p:nvSpPr>
+        <p:spPr>
+          <a:xfrm>
+            <a:off x="7713421" y="91440"/>
+            <a:ext cx="3893058" cy="274320"/>
+          </a:xfrm>
+          <a:prstGeom prst="rect">
+            <a:avLst/>
+          </a:prstGeom>
+          <a:noFill/>
+          <a:ln/>
+        </p:spPr>
+        <p:txBody>
+          <a:bodyPr wrap="square" lIns="0" tIns="0" rIns="0" bIns="0" rtlCol="0" anchor="ctr"/>
+          <a:lstStyle/>
+          <a:p>
+            <a:pPr indent="0" marL="0">
+              <a:buNone/>
+            </a:pPr>
+            <a:r>
+              <a:rPr lang="en-US" sz="1100" b="1" dirty="0">
+                <a:solidFill>
+                  <a:srgbClr val="075985"/>
+                </a:solidFill>
+                <a:latin typeface="Calibri" pitchFamily="34" charset="0"/>
+                <a:ea typeface="Calibri" pitchFamily="34" charset="-122"/>
+                <a:cs typeface="Calibri" pitchFamily="34" charset="-120"/>
+              </a:rPr>
+              <a:t>DA COMPRENDERE OGGI</a:t>
+            </a:r>
+            <a:pPr indent="0" marL="0">
+              <a:buNone/>
+            </a:pPr>
+            <a:r>
+              <a:rPr lang="en-US" sz="1100" dirty="0">
+                <a:solidFill>
+                  <a:srgbClr val="075985"/>
+                </a:solidFill>
+                <a:latin typeface="Calibri" pitchFamily="34" charset="0"/>
+                <a:ea typeface="Calibri" pitchFamily="34" charset="-122"/>
+                <a:cs typeface="Calibri" pitchFamily="34" charset="-120"/>
+              </a:rPr>
+              <a:t> · l'architettura di von Neumann</a:t>
+            </a:r>
+            <a:endParaRPr lang="en-US" sz="1100" dirty="0"/>
+          </a:p>
+        </p:txBody>
+      </p:sp>
+      <p:sp>
+        <p:nvSpPr>
           <p:cNvPr id="25" name="Slide Number Placeholder 0"/>
           <p:cNvSpPr>
             <a:spLocks noGrp="1"/>
@@ -21344,6 +22790,133 @@
       </p:sp>
       <p:sp>
         <p:nvSpPr>
+          <p:cNvPr id="19" name="Shape 17"/>
+          <p:cNvSpPr/>
+          <p:nvPr/>
+        </p:nvSpPr>
+        <p:spPr>
+          <a:xfrm>
+            <a:off x="7329373" y="91440"/>
+            <a:ext cx="4313682" cy="274320"/>
+          </a:xfrm>
+          <a:prstGeom prst="rect">
+            <a:avLst/>
+          </a:prstGeom>
+          <a:solidFill>
+            <a:srgbClr val="E0F2FE"/>
+          </a:solidFill>
+          <a:ln w="12700">
+            <a:solidFill>
+              <a:srgbClr val="0369A1"/>
+            </a:solidFill>
+            <a:prstDash val="solid"/>
+          </a:ln>
+        </p:spPr>
+      </p:sp>
+      <p:sp>
+        <p:nvSpPr>
+          <p:cNvPr id="20" name="Shape 18"/>
+          <p:cNvSpPr/>
+          <p:nvPr/>
+        </p:nvSpPr>
+        <p:spPr>
+          <a:xfrm>
+            <a:off x="7329373" y="91440"/>
+            <a:ext cx="73152" cy="274320"/>
+          </a:xfrm>
+          <a:prstGeom prst="rect">
+            <a:avLst/>
+          </a:prstGeom>
+          <a:solidFill>
+            <a:srgbClr val="0369A1"/>
+          </a:solidFill>
+          <a:ln w="12700">
+            <a:solidFill>
+              <a:srgbClr val="0369A1"/>
+            </a:solidFill>
+            <a:prstDash val="solid"/>
+          </a:ln>
+        </p:spPr>
+      </p:sp>
+      <p:pic>
+        <p:nvPicPr>
+          <p:cNvPr id="21" name="Image 0" descr="preencoded.png">    </p:cNvPr>
+          <p:cNvPicPr>
+            <a:picLocks noChangeAspect="1"/>
+          </p:cNvPicPr>
+          <p:nvPr/>
+        </p:nvPicPr>
+        <p:blipFill>
+          <a:blip r:embed="rId1"/>
+          <a:stretch>
+            <a:fillRect/>
+          </a:stretch>
+        </p:blipFill>
+        <p:spPr>
+          <a:xfrm>
+            <a:off x="7457389" y="128016"/>
+            <a:ext cx="201168" cy="201168"/>
+          </a:xfrm>
+          <a:prstGeom prst="rect">
+            <a:avLst/>
+          </a:prstGeom>
+        </p:spPr>
+      </p:pic>
+      <p:sp>
+        <p:nvSpPr>
+          <p:cNvPr id="22" name="Text 19"/>
+          <p:cNvSpPr txBox="1"/>
+          <p:nvPr/>
+        </p:nvSpPr>
+        <p:spPr>
+          <a:xfrm>
+            <a:off x="7713421" y="91440"/>
+            <a:ext cx="3893058" cy="274320"/>
+          </a:xfrm>
+          <a:prstGeom prst="rect">
+            <a:avLst/>
+          </a:prstGeom>
+          <a:noFill/>
+          <a:ln/>
+        </p:spPr>
+        <p:txBody>
+          <a:bodyPr wrap="square" lIns="0" tIns="0" rIns="0" bIns="0" rtlCol="0" anchor="ctr"/>
+          <a:lstStyle/>
+          <a:p>
+            <a:pPr indent="0" marL="0">
+              <a:buNone/>
+            </a:pPr>
+            <a:r>
+              <a:rPr lang="en-US" sz="1100" b="1" dirty="0">
+                <a:solidFill>
+                  <a:srgbClr val="075985"/>
+                </a:solidFill>
+                <a:latin typeface="Calibri" pitchFamily="34" charset="0"/>
+                <a:ea typeface="Calibri" pitchFamily="34" charset="-122"/>
+                <a:cs typeface="Calibri" pitchFamily="34" charset="-120"/>
+              </a:rPr>
+              <a:t>DA COMPRENDERE OGGI</a:t>
+            </a:r>
+            <a:pPr indent="0" marL="0">
+              <a:buNone/>
+            </a:pPr>
+            <a:r>
+              <a:rPr lang="en-US" sz="1100" dirty="0">
+                <a:solidFill>
+                  <a:srgbClr val="075985"/>
+                </a:solidFill>
+                <a:latin typeface="Calibri" pitchFamily="34" charset="0"/>
+                <a:ea typeface="Calibri" pitchFamily="34" charset="-122"/>
+                <a:cs typeface="Calibri" pitchFamily="34" charset="-120"/>
+              </a:rPr>
+              <a:t> · l'architettura di von Neumann</a:t>
+            </a:r>
+            <a:endParaRPr lang="en-US" sz="1100" dirty="0"/>
+          </a:p>
+        </p:txBody>
+      </p:sp>
+      <p:sp>
+        <p:nvSpPr>
           <p:cNvPr id="25" name="Slide Number Placeholder 0"/>
           <p:cNvSpPr>
             <a:spLocks noGrp="1"/>
@@ -21826,6 +23399,133 @@
               <a:t>due livelli di tensione su un filo, due stati di un interruttore, due valori di una variabile booleana</a:t>
             </a:r>
             <a:endParaRPr lang="en-US" sz="1900" dirty="0"/>
+          </a:p>
+        </p:txBody>
+      </p:sp>
+      <p:sp>
+        <p:nvSpPr>
+          <p:cNvPr id="14" name="Shape 12"/>
+          <p:cNvSpPr/>
+          <p:nvPr/>
+        </p:nvSpPr>
+        <p:spPr>
+          <a:xfrm>
+            <a:off x="8117281" y="91440"/>
+            <a:ext cx="3525774" cy="274320"/>
+          </a:xfrm>
+          <a:prstGeom prst="rect">
+            <a:avLst/>
+          </a:prstGeom>
+          <a:solidFill>
+            <a:srgbClr val="E0F2FE"/>
+          </a:solidFill>
+          <a:ln w="12700">
+            <a:solidFill>
+              <a:srgbClr val="0369A1"/>
+            </a:solidFill>
+            <a:prstDash val="solid"/>
+          </a:ln>
+        </p:spPr>
+      </p:sp>
+      <p:sp>
+        <p:nvSpPr>
+          <p:cNvPr id="15" name="Shape 13"/>
+          <p:cNvSpPr/>
+          <p:nvPr/>
+        </p:nvSpPr>
+        <p:spPr>
+          <a:xfrm>
+            <a:off x="8117281" y="91440"/>
+            <a:ext cx="73152" cy="274320"/>
+          </a:xfrm>
+          <a:prstGeom prst="rect">
+            <a:avLst/>
+          </a:prstGeom>
+          <a:solidFill>
+            <a:srgbClr val="0369A1"/>
+          </a:solidFill>
+          <a:ln w="12700">
+            <a:solidFill>
+              <a:srgbClr val="0369A1"/>
+            </a:solidFill>
+            <a:prstDash val="solid"/>
+          </a:ln>
+        </p:spPr>
+      </p:sp>
+      <p:pic>
+        <p:nvPicPr>
+          <p:cNvPr id="16" name="Image 0" descr="preencoded.png">    </p:cNvPr>
+          <p:cNvPicPr>
+            <a:picLocks noChangeAspect="1"/>
+          </p:cNvPicPr>
+          <p:nvPr/>
+        </p:nvPicPr>
+        <p:blipFill>
+          <a:blip r:embed="rId1"/>
+          <a:stretch>
+            <a:fillRect/>
+          </a:stretch>
+        </p:blipFill>
+        <p:spPr>
+          <a:xfrm>
+            <a:off x="8245297" y="128016"/>
+            <a:ext cx="201168" cy="201168"/>
+          </a:xfrm>
+          <a:prstGeom prst="rect">
+            <a:avLst/>
+          </a:prstGeom>
+        </p:spPr>
+      </p:pic>
+      <p:sp>
+        <p:nvSpPr>
+          <p:cNvPr id="17" name="Text 14"/>
+          <p:cNvSpPr txBox="1"/>
+          <p:nvPr/>
+        </p:nvSpPr>
+        <p:spPr>
+          <a:xfrm>
+            <a:off x="8501329" y="91440"/>
+            <a:ext cx="3105150" cy="274320"/>
+          </a:xfrm>
+          <a:prstGeom prst="rect">
+            <a:avLst/>
+          </a:prstGeom>
+          <a:noFill/>
+          <a:ln/>
+        </p:spPr>
+        <p:txBody>
+          <a:bodyPr wrap="square" lIns="0" tIns="0" rIns="0" bIns="0" rtlCol="0" anchor="ctr"/>
+          <a:lstStyle/>
+          <a:p>
+            <a:pPr indent="0" marL="0">
+              <a:buNone/>
+            </a:pPr>
+            <a:r>
+              <a:rPr lang="en-US" sz="1100" b="1" dirty="0">
+                <a:solidFill>
+                  <a:srgbClr val="075985"/>
+                </a:solidFill>
+                <a:latin typeface="Calibri" pitchFamily="34" charset="0"/>
+                <a:ea typeface="Calibri" pitchFamily="34" charset="-122"/>
+                <a:cs typeface="Calibri" pitchFamily="34" charset="-120"/>
+              </a:rPr>
+              <a:t>DA COMPRENDERE OGGI</a:t>
+            </a:r>
+            <a:pPr indent="0" marL="0">
+              <a:buNone/>
+            </a:pPr>
+            <a:r>
+              <a:rPr lang="en-US" sz="1100" dirty="0">
+                <a:solidFill>
+                  <a:srgbClr val="075985"/>
+                </a:solidFill>
+                <a:latin typeface="Calibri" pitchFamily="34" charset="0"/>
+                <a:ea typeface="Calibri" pitchFamily="34" charset="-122"/>
+                <a:cs typeface="Calibri" pitchFamily="34" charset="-120"/>
+              </a:rPr>
+              <a:t> · analisi e sintesi</a:t>
+            </a:r>
+            <a:endParaRPr lang="en-US" sz="1100" dirty="0"/>
           </a:p>
         </p:txBody>
       </p:sp>
@@ -22305,6 +24005,324 @@
       </p:sp>
       <p:sp>
         <p:nvSpPr>
+          <p:cNvPr id="9" name="Shape 7"/>
+          <p:cNvSpPr/>
+          <p:nvPr/>
+        </p:nvSpPr>
+        <p:spPr>
+          <a:xfrm>
+            <a:off x="6175451" y="91440"/>
+            <a:ext cx="5467604" cy="274320"/>
+          </a:xfrm>
+          <a:prstGeom prst="rect">
+            <a:avLst/>
+          </a:prstGeom>
+          <a:solidFill>
+            <a:srgbClr val="F3E8FF"/>
+          </a:solidFill>
+          <a:ln w="12700">
+            <a:solidFill>
+              <a:srgbClr val="7E22CE"/>
+            </a:solidFill>
+            <a:prstDash val="dash"/>
+          </a:ln>
+        </p:spPr>
+      </p:sp>
+      <p:sp>
+        <p:nvSpPr>
+          <p:cNvPr id="10" name="Shape 8"/>
+          <p:cNvSpPr/>
+          <p:nvPr/>
+        </p:nvSpPr>
+        <p:spPr>
+          <a:xfrm>
+            <a:off x="6202883" y="128016"/>
+            <a:ext cx="45720" cy="45720"/>
+          </a:xfrm>
+          <a:prstGeom prst="rect">
+            <a:avLst/>
+          </a:prstGeom>
+          <a:solidFill>
+            <a:srgbClr val="7E22CE"/>
+          </a:solidFill>
+          <a:ln w="12700">
+            <a:solidFill>
+              <a:srgbClr val="7E22CE"/>
+            </a:solidFill>
+            <a:prstDash val="solid"/>
+          </a:ln>
+        </p:spPr>
+      </p:sp>
+      <p:sp>
+        <p:nvSpPr>
+          <p:cNvPr id="11" name="Shape 9"/>
+          <p:cNvSpPr/>
+          <p:nvPr/>
+        </p:nvSpPr>
+        <p:spPr>
+          <a:xfrm>
+            <a:off x="6202883" y="205740"/>
+            <a:ext cx="45720" cy="45720"/>
+          </a:xfrm>
+          <a:prstGeom prst="rect">
+            <a:avLst/>
+          </a:prstGeom>
+          <a:solidFill>
+            <a:srgbClr val="7E22CE"/>
+          </a:solidFill>
+          <a:ln w="12700">
+            <a:solidFill>
+              <a:srgbClr val="7E22CE"/>
+            </a:solidFill>
+            <a:prstDash val="solid"/>
+          </a:ln>
+        </p:spPr>
+      </p:sp>
+      <p:sp>
+        <p:nvSpPr>
+          <p:cNvPr id="12" name="Shape 10"/>
+          <p:cNvSpPr/>
+          <p:nvPr/>
+        </p:nvSpPr>
+        <p:spPr>
+          <a:xfrm>
+            <a:off x="6202883" y="283464"/>
+            <a:ext cx="45720" cy="45720"/>
+          </a:xfrm>
+          <a:prstGeom prst="rect">
+            <a:avLst/>
+          </a:prstGeom>
+          <a:solidFill>
+            <a:srgbClr val="7E22CE"/>
+          </a:solidFill>
+          <a:ln w="12700">
+            <a:solidFill>
+              <a:srgbClr val="7E22CE"/>
+            </a:solidFill>
+            <a:prstDash val="solid"/>
+          </a:ln>
+        </p:spPr>
+      </p:sp>
+      <p:pic>
+        <p:nvPicPr>
+          <p:cNvPr id="13" name="Image 0" descr="preencoded.png">    </p:cNvPr>
+          <p:cNvPicPr>
+            <a:picLocks noChangeAspect="1"/>
+          </p:cNvPicPr>
+          <p:nvPr/>
+        </p:nvPicPr>
+        <p:blipFill>
+          <a:blip r:embed="rId1"/>
+          <a:stretch>
+            <a:fillRect/>
+          </a:stretch>
+        </p:blipFill>
+        <p:spPr>
+          <a:xfrm>
+            <a:off x="6303467" y="128016"/>
+            <a:ext cx="201168" cy="201168"/>
+          </a:xfrm>
+          <a:prstGeom prst="rect">
+            <a:avLst/>
+          </a:prstGeom>
+        </p:spPr>
+      </p:pic>
+      <p:sp>
+        <p:nvSpPr>
+          <p:cNvPr id="14" name="Text 11"/>
+          <p:cNvSpPr txBox="1"/>
+          <p:nvPr/>
+        </p:nvSpPr>
+        <p:spPr>
+          <a:xfrm>
+            <a:off x="6559499" y="91440"/>
+            <a:ext cx="5046980" cy="274320"/>
+          </a:xfrm>
+          <a:prstGeom prst="rect">
+            <a:avLst/>
+          </a:prstGeom>
+          <a:noFill/>
+          <a:ln/>
+        </p:spPr>
+        <p:txBody>
+          <a:bodyPr wrap="square" lIns="0" tIns="0" rIns="0" bIns="0" rtlCol="0" anchor="ctr"/>
+          <a:lstStyle/>
+          <a:p>
+            <a:pPr indent="0" marL="0">
+              <a:buNone/>
+            </a:pPr>
+            <a:r>
+              <a:rPr lang="en-US" sz="1100" b="1" dirty="0">
+                <a:solidFill>
+                  <a:srgbClr val="6B21A8"/>
+                </a:solidFill>
+                <a:latin typeface="Calibri" pitchFamily="34" charset="0"/>
+                <a:ea typeface="Calibri" pitchFamily="34" charset="-122"/>
+                <a:cs typeface="Calibri" pitchFamily="34" charset="-120"/>
+              </a:rPr>
+              <a:t>DA COMPRENDERE PIÙ AVANTI</a:t>
+            </a:r>
+            <a:pPr indent="0" marL="0">
+              <a:buNone/>
+            </a:pPr>
+            <a:r>
+              <a:rPr lang="en-US" sz="1100" dirty="0">
+                <a:solidFill>
+                  <a:srgbClr val="6B21A8"/>
+                </a:solidFill>
+                <a:latin typeface="Calibri" pitchFamily="34" charset="0"/>
+                <a:ea typeface="Calibri" pitchFamily="34" charset="-122"/>
+                <a:cs typeface="Calibri" pitchFamily="34" charset="-120"/>
+              </a:rPr>
+              <a:t> · minimizzazione, Karnaugh</a:t>
+            </a:r>
+            <a:pPr indent="0" marL="0">
+              <a:buNone/>
+            </a:pPr>
+            <a:r>
+              <a:rPr lang="en-US" sz="1100" b="1" dirty="0">
+                <a:solidFill>
+                  <a:srgbClr val="6B21A8"/>
+                </a:solidFill>
+                <a:latin typeface="Calibri" pitchFamily="34" charset="0"/>
+                <a:ea typeface="Calibri" pitchFamily="34" charset="-122"/>
+                <a:cs typeface="Calibri" pitchFamily="34" charset="-120"/>
+              </a:rPr>
+              <a:t> → Lezione 09</a:t>
+            </a:r>
+            <a:endParaRPr lang="en-US" sz="1100" dirty="0"/>
+          </a:p>
+        </p:txBody>
+      </p:sp>
+      <p:sp>
+        <p:nvSpPr>
+          <p:cNvPr id="15" name="Shape 12"/>
+          <p:cNvSpPr/>
+          <p:nvPr/>
+        </p:nvSpPr>
+        <p:spPr>
+          <a:xfrm>
+            <a:off x="2539949" y="91440"/>
+            <a:ext cx="3525774" cy="274320"/>
+          </a:xfrm>
+          <a:prstGeom prst="rect">
+            <a:avLst/>
+          </a:prstGeom>
+          <a:solidFill>
+            <a:srgbClr val="E0F2FE"/>
+          </a:solidFill>
+          <a:ln w="12700">
+            <a:solidFill>
+              <a:srgbClr val="0369A1"/>
+            </a:solidFill>
+            <a:prstDash val="solid"/>
+          </a:ln>
+        </p:spPr>
+      </p:sp>
+      <p:sp>
+        <p:nvSpPr>
+          <p:cNvPr id="16" name="Shape 13"/>
+          <p:cNvSpPr/>
+          <p:nvPr/>
+        </p:nvSpPr>
+        <p:spPr>
+          <a:xfrm>
+            <a:off x="2539949" y="91440"/>
+            <a:ext cx="73152" cy="274320"/>
+          </a:xfrm>
+          <a:prstGeom prst="rect">
+            <a:avLst/>
+          </a:prstGeom>
+          <a:solidFill>
+            <a:srgbClr val="0369A1"/>
+          </a:solidFill>
+          <a:ln w="12700">
+            <a:solidFill>
+              <a:srgbClr val="0369A1"/>
+            </a:solidFill>
+            <a:prstDash val="solid"/>
+          </a:ln>
+        </p:spPr>
+      </p:sp>
+      <p:pic>
+        <p:nvPicPr>
+          <p:cNvPr id="17" name="Image 1" descr="preencoded.png">    </p:cNvPr>
+          <p:cNvPicPr>
+            <a:picLocks noChangeAspect="1"/>
+          </p:cNvPicPr>
+          <p:nvPr/>
+        </p:nvPicPr>
+        <p:blipFill>
+          <a:blip r:embed="rId2"/>
+          <a:stretch>
+            <a:fillRect/>
+          </a:stretch>
+        </p:blipFill>
+        <p:spPr>
+          <a:xfrm>
+            <a:off x="2667965" y="128016"/>
+            <a:ext cx="201168" cy="201168"/>
+          </a:xfrm>
+          <a:prstGeom prst="rect">
+            <a:avLst/>
+          </a:prstGeom>
+        </p:spPr>
+      </p:pic>
+      <p:sp>
+        <p:nvSpPr>
+          <p:cNvPr id="18" name="Text 14"/>
+          <p:cNvSpPr txBox="1"/>
+          <p:nvPr/>
+        </p:nvSpPr>
+        <p:spPr>
+          <a:xfrm>
+            <a:off x="2923997" y="91440"/>
+            <a:ext cx="3105150" cy="274320"/>
+          </a:xfrm>
+          <a:prstGeom prst="rect">
+            <a:avLst/>
+          </a:prstGeom>
+          <a:noFill/>
+          <a:ln/>
+        </p:spPr>
+        <p:txBody>
+          <a:bodyPr wrap="square" lIns="0" tIns="0" rIns="0" bIns="0" rtlCol="0" anchor="ctr"/>
+          <a:lstStyle/>
+          <a:p>
+            <a:pPr indent="0" marL="0">
+              <a:buNone/>
+            </a:pPr>
+            <a:r>
+              <a:rPr lang="en-US" sz="1100" b="1" dirty="0">
+                <a:solidFill>
+                  <a:srgbClr val="075985"/>
+                </a:solidFill>
+                <a:latin typeface="Calibri" pitchFamily="34" charset="0"/>
+                <a:ea typeface="Calibri" pitchFamily="34" charset="-122"/>
+                <a:cs typeface="Calibri" pitchFamily="34" charset="-120"/>
+              </a:rPr>
+              <a:t>DA COMPRENDERE OGGI</a:t>
+            </a:r>
+            <a:pPr indent="0" marL="0">
+              <a:buNone/>
+            </a:pPr>
+            <a:r>
+              <a:rPr lang="en-US" sz="1100" dirty="0">
+                <a:solidFill>
+                  <a:srgbClr val="075985"/>
+                </a:solidFill>
+                <a:latin typeface="Calibri" pitchFamily="34" charset="0"/>
+                <a:ea typeface="Calibri" pitchFamily="34" charset="-122"/>
+                <a:cs typeface="Calibri" pitchFamily="34" charset="-120"/>
+              </a:rPr>
+              <a:t> · analisi e sintesi</a:t>
+            </a:r>
+            <a:endParaRPr lang="en-US" sz="1100" dirty="0"/>
+          </a:p>
+        </p:txBody>
+      </p:sp>
+      <p:sp>
+        <p:nvSpPr>
           <p:cNvPr id="25" name="Slide Number Placeholder 0"/>
           <p:cNvSpPr>
             <a:spLocks noGrp="1"/>
@@ -22792,6 +24810,133 @@
       </p:sp>
       <p:sp>
         <p:nvSpPr>
+          <p:cNvPr id="14" name="Shape 12"/>
+          <p:cNvSpPr/>
+          <p:nvPr/>
+        </p:nvSpPr>
+        <p:spPr>
+          <a:xfrm>
+            <a:off x="8051622" y="91440"/>
+            <a:ext cx="3591433" cy="274320"/>
+          </a:xfrm>
+          <a:prstGeom prst="rect">
+            <a:avLst/>
+          </a:prstGeom>
+          <a:solidFill>
+            <a:srgbClr val="E0F2FE"/>
+          </a:solidFill>
+          <a:ln w="12700">
+            <a:solidFill>
+              <a:srgbClr val="0369A1"/>
+            </a:solidFill>
+            <a:prstDash val="solid"/>
+          </a:ln>
+        </p:spPr>
+      </p:sp>
+      <p:sp>
+        <p:nvSpPr>
+          <p:cNvPr id="15" name="Shape 13"/>
+          <p:cNvSpPr/>
+          <p:nvPr/>
+        </p:nvSpPr>
+        <p:spPr>
+          <a:xfrm>
+            <a:off x="8051622" y="91440"/>
+            <a:ext cx="73152" cy="274320"/>
+          </a:xfrm>
+          <a:prstGeom prst="rect">
+            <a:avLst/>
+          </a:prstGeom>
+          <a:solidFill>
+            <a:srgbClr val="0369A1"/>
+          </a:solidFill>
+          <a:ln w="12700">
+            <a:solidFill>
+              <a:srgbClr val="0369A1"/>
+            </a:solidFill>
+            <a:prstDash val="solid"/>
+          </a:ln>
+        </p:spPr>
+      </p:sp>
+      <p:pic>
+        <p:nvPicPr>
+          <p:cNvPr id="16" name="Image 0" descr="preencoded.png">    </p:cNvPr>
+          <p:cNvPicPr>
+            <a:picLocks noChangeAspect="1"/>
+          </p:cNvPicPr>
+          <p:nvPr/>
+        </p:nvPicPr>
+        <p:blipFill>
+          <a:blip r:embed="rId1"/>
+          <a:stretch>
+            <a:fillRect/>
+          </a:stretch>
+        </p:blipFill>
+        <p:spPr>
+          <a:xfrm>
+            <a:off x="8179638" y="128016"/>
+            <a:ext cx="201168" cy="201168"/>
+          </a:xfrm>
+          <a:prstGeom prst="rect">
+            <a:avLst/>
+          </a:prstGeom>
+        </p:spPr>
+      </p:pic>
+      <p:sp>
+        <p:nvSpPr>
+          <p:cNvPr id="17" name="Text 14"/>
+          <p:cNvSpPr txBox="1"/>
+          <p:nvPr/>
+        </p:nvSpPr>
+        <p:spPr>
+          <a:xfrm>
+            <a:off x="8435670" y="91440"/>
+            <a:ext cx="3170809" cy="274320"/>
+          </a:xfrm>
+          <a:prstGeom prst="rect">
+            <a:avLst/>
+          </a:prstGeom>
+          <a:noFill/>
+          <a:ln/>
+        </p:spPr>
+        <p:txBody>
+          <a:bodyPr wrap="square" lIns="0" tIns="0" rIns="0" bIns="0" rtlCol="0" anchor="ctr"/>
+          <a:lstStyle/>
+          <a:p>
+            <a:pPr indent="0" marL="0">
+              <a:buNone/>
+            </a:pPr>
+            <a:r>
+              <a:rPr lang="en-US" sz="1100" b="1" dirty="0">
+                <a:solidFill>
+                  <a:srgbClr val="075985"/>
+                </a:solidFill>
+                <a:latin typeface="Calibri" pitchFamily="34" charset="0"/>
+                <a:ea typeface="Calibri" pitchFamily="34" charset="-122"/>
+                <a:cs typeface="Calibri" pitchFamily="34" charset="-120"/>
+              </a:rPr>
+              <a:t>DA COMPRENDERE OGGI</a:t>
+            </a:r>
+            <a:pPr indent="0" marL="0">
+              <a:buNone/>
+            </a:pPr>
+            <a:r>
+              <a:rPr lang="en-US" sz="1100" dirty="0">
+                <a:solidFill>
+                  <a:srgbClr val="075985"/>
+                </a:solidFill>
+                <a:latin typeface="Calibri" pitchFamily="34" charset="0"/>
+                <a:ea typeface="Calibri" pitchFamily="34" charset="-122"/>
+                <a:cs typeface="Calibri" pitchFamily="34" charset="-120"/>
+              </a:rPr>
+              <a:t> · l'algebra di Boole</a:t>
+            </a:r>
+            <a:endParaRPr lang="en-US" sz="1100" dirty="0"/>
+          </a:p>
+        </p:txBody>
+      </p:sp>
+      <p:sp>
+        <p:nvSpPr>
           <p:cNvPr id="25" name="Slide Number Placeholder 0"/>
           <p:cNvSpPr>
             <a:spLocks noGrp="1"/>
@@ -22978,9 +25123,59 @@
           </a:p>
         </p:txBody>
       </p:sp>
+      <p:sp>
+        <p:nvSpPr>
+          <p:cNvPr id="5" name="Shape 3"/>
+          <p:cNvSpPr/>
+          <p:nvPr/>
+        </p:nvSpPr>
+        <p:spPr>
+          <a:xfrm>
+            <a:off x="8182940" y="91440"/>
+            <a:ext cx="3460115" cy="274320"/>
+          </a:xfrm>
+          <a:prstGeom prst="rect">
+            <a:avLst/>
+          </a:prstGeom>
+          <a:solidFill>
+            <a:srgbClr val="E0F2FE"/>
+          </a:solidFill>
+          <a:ln w="12700">
+            <a:solidFill>
+              <a:srgbClr val="0369A1"/>
+            </a:solidFill>
+            <a:prstDash val="solid"/>
+          </a:ln>
+        </p:spPr>
+      </p:sp>
+      <p:sp>
+        <p:nvSpPr>
+          <p:cNvPr id="6" name="Shape 4"/>
+          <p:cNvSpPr/>
+          <p:nvPr/>
+        </p:nvSpPr>
+        <p:spPr>
+          <a:xfrm>
+            <a:off x="8182940" y="91440"/>
+            <a:ext cx="73152" cy="274320"/>
+          </a:xfrm>
+          <a:prstGeom prst="rect">
+            <a:avLst/>
+          </a:prstGeom>
+          <a:solidFill>
+            <a:srgbClr val="0369A1"/>
+          </a:solidFill>
+          <a:ln w="12700">
+            <a:solidFill>
+              <a:srgbClr val="0369A1"/>
+            </a:solidFill>
+            <a:prstDash val="solid"/>
+          </a:ln>
+        </p:spPr>
+      </p:sp>
       <p:pic>
         <p:nvPicPr>
-          <p:cNvPr id="6" name="Image 0" descr="preencoded.png">    </p:cNvPr>
+          <p:cNvPr id="7" name="Image 0" descr="preencoded.png">    </p:cNvPr>
           <p:cNvPicPr>
             <a:picLocks noChangeAspect="1"/>
           </p:cNvPicPr>
@@ -22994,6 +25189,83 @@
         </p:blipFill>
         <p:spPr>
           <a:xfrm>
+            <a:off x="8310956" y="128016"/>
+            <a:ext cx="201168" cy="201168"/>
+          </a:xfrm>
+          <a:prstGeom prst="rect">
+            <a:avLst/>
+          </a:prstGeom>
+        </p:spPr>
+      </p:pic>
+      <p:sp>
+        <p:nvSpPr>
+          <p:cNvPr id="8" name="Text 5"/>
+          <p:cNvSpPr txBox="1"/>
+          <p:nvPr/>
+        </p:nvSpPr>
+        <p:spPr>
+          <a:xfrm>
+            <a:off x="8566988" y="91440"/>
+            <a:ext cx="3039491" cy="274320"/>
+          </a:xfrm>
+          <a:prstGeom prst="rect">
+            <a:avLst/>
+          </a:prstGeom>
+          <a:noFill/>
+          <a:ln/>
+        </p:spPr>
+        <p:txBody>
+          <a:bodyPr wrap="square" lIns="0" tIns="0" rIns="0" bIns="0" rtlCol="0" anchor="ctr"/>
+          <a:lstStyle/>
+          <a:p>
+            <a:pPr indent="0" marL="0">
+              <a:buNone/>
+            </a:pPr>
+            <a:r>
+              <a:rPr lang="en-US" sz="1100" b="1" dirty="0">
+                <a:solidFill>
+                  <a:srgbClr val="075985"/>
+                </a:solidFill>
+                <a:latin typeface="Calibri" pitchFamily="34" charset="0"/>
+                <a:ea typeface="Calibri" pitchFamily="34" charset="-122"/>
+                <a:cs typeface="Calibri" pitchFamily="34" charset="-120"/>
+              </a:rPr>
+              <a:t>DA COMPRENDERE OGGI</a:t>
+            </a:r>
+            <a:pPr indent="0" marL="0">
+              <a:buNone/>
+            </a:pPr>
+            <a:r>
+              <a:rPr lang="en-US" sz="1100" dirty="0">
+                <a:solidFill>
+                  <a:srgbClr val="075985"/>
+                </a:solidFill>
+                <a:latin typeface="Calibri" pitchFamily="34" charset="0"/>
+                <a:ea typeface="Calibri" pitchFamily="34" charset="-122"/>
+                <a:cs typeface="Calibri" pitchFamily="34" charset="-120"/>
+              </a:rPr>
+              <a:t> · le porte logiche</a:t>
+            </a:r>
+            <a:endParaRPr lang="en-US" sz="1100" dirty="0"/>
+          </a:p>
+        </p:txBody>
+      </p:sp>
+      <p:pic>
+        <p:nvPicPr>
+          <p:cNvPr id="10" name="Image 1" descr="preencoded.png">    </p:cNvPr>
+          <p:cNvPicPr>
+            <a:picLocks noChangeAspect="1"/>
+          </p:cNvPicPr>
+          <p:nvPr/>
+        </p:nvPicPr>
+        <p:blipFill>
+          <a:blip r:embed="rId2"/>
+          <a:stretch>
+            <a:fillRect/>
+          </a:stretch>
+        </p:blipFill>
+        <p:spPr>
+          <a:xfrm>
             <a:off x="822960" y="2236278"/>
             <a:ext cx="2966618" cy="830964"/>
           </a:xfrm>
@@ -23004,7 +25276,7 @@
       </p:pic>
       <p:sp>
         <p:nvSpPr>
-          <p:cNvPr id="7" name="Text 3"/>
+          <p:cNvPr id="11" name="Text 6"/>
           <p:cNvSpPr txBox="1"/>
           <p:nvPr/>
         </p:nvSpPr>
@@ -24104,7 +26376,7 @@
       </p:graphicFrame>
       <p:sp>
         <p:nvSpPr>
-          <p:cNvPr id="9" name="Shape 4"/>
+          <p:cNvPr id="13" name="Shape 7"/>
           <p:cNvSpPr/>
           <p:nvPr/>
         </p:nvSpPr>
@@ -24131,7 +26403,7 @@
       </p:sp>
       <p:sp>
         <p:nvSpPr>
-          <p:cNvPr id="10" name="Text 5"/>
+          <p:cNvPr id="14" name="Text 8"/>
           <p:cNvSpPr txBox="1"/>
           <p:nvPr/>
         </p:nvSpPr>
@@ -24178,14 +26450,14 @@
       </p:sp>
       <p:pic>
         <p:nvPicPr>
-          <p:cNvPr id="11" name="Image 1" descr="preencoded.png">    </p:cNvPr>
+          <p:cNvPr id="15" name="Image 2" descr="preencoded.png">    </p:cNvPr>
           <p:cNvPicPr>
             <a:picLocks noChangeAspect="1"/>
           </p:cNvPicPr>
           <p:nvPr/>
         </p:nvPicPr>
         <p:blipFill>
-          <a:blip r:embed="rId2"/>
+          <a:blip r:embed="rId3"/>
           <a:stretch>
             <a:fillRect/>
           </a:stretch>
@@ -24202,7 +26474,7 @@
       </p:pic>
       <p:sp>
         <p:nvSpPr>
-          <p:cNvPr id="12" name="Text 6"/>
+          <p:cNvPr id="16" name="Text 9"/>
           <p:cNvSpPr txBox="1"/>
           <p:nvPr/>
         </p:nvSpPr>
@@ -25302,7 +27574,7 @@
       </p:graphicFrame>
       <p:sp>
         <p:nvSpPr>
-          <p:cNvPr id="14" name="Shape 7"/>
+          <p:cNvPr id="18" name="Shape 10"/>
           <p:cNvSpPr/>
           <p:nvPr/>
         </p:nvSpPr>
@@ -25329,7 +27601,7 @@
       </p:sp>
       <p:sp>
         <p:nvSpPr>
-          <p:cNvPr id="15" name="Text 8"/>
+          <p:cNvPr id="19" name="Text 11"/>
           <p:cNvSpPr txBox="1"/>
           <p:nvPr/>
         </p:nvSpPr>
@@ -25376,14 +27648,14 @@
       </p:sp>
       <p:pic>
         <p:nvPicPr>
-          <p:cNvPr id="16" name="Image 2" descr="preencoded.png">    </p:cNvPr>
+          <p:cNvPr id="20" name="Image 3" descr="preencoded.png">    </p:cNvPr>
           <p:cNvPicPr>
             <a:picLocks noChangeAspect="1"/>
           </p:cNvPicPr>
           <p:nvPr/>
         </p:nvPicPr>
         <p:blipFill>
-          <a:blip r:embed="rId3"/>
+          <a:blip r:embed="rId4"/>
           <a:stretch>
             <a:fillRect/>
           </a:stretch>
@@ -25400,7 +27672,7 @@
       </p:pic>
       <p:sp>
         <p:nvSpPr>
-          <p:cNvPr id="17" name="Text 9"/>
+          <p:cNvPr id="21" name="Text 12"/>
           <p:cNvSpPr txBox="1"/>
           <p:nvPr/>
         </p:nvSpPr>

--- a/it/slides/08-Architettura_dei_Calcolatori-Algebra_di_Boole_1.pptx
+++ b/it/slides/08-Architettura_dei_Calcolatori-Algebra_di_Boole_1.pptx
@@ -125,13 +125,13 @@
   <p:extLst>
     <p:ext uri="{521415D9-36F7-43E2-AB2F-B90AF26B5E84}">
       <p14:sectionLst xmlns:p14="http://schemas.microsoft.com/office/powerpoint/2010/main">
-        <p14:section name="Apertura" id="{d148395e-e9a2-6cb2-e8d1-234e251d7406}">
+        <p14:section name="Apertura" id="{747a7956-a231-0606-8b25-61abc7bcd8af}">
           <p14:sldIdLst>
             <p14:sldId id="256"/>
             <p14:sldId id="257"/>
           </p14:sldIdLst>
         </p14:section>
-        <p14:section name="Il calcolatore come macchina logica" id="{92584dc6-ef93-8ebe-bee3-81b4b3967e7c}">
+        <p14:section name="Il calcolatore come macchina logica" id="{26877583-03f7-80ff-a059-79a7712b0596}">
           <p14:sldIdLst>
             <p14:sldId id="258"/>
             <p14:sldId id="259"/>
@@ -140,7 +140,7 @@
             <p14:sldId id="262"/>
           </p14:sldIdLst>
         </p14:section>
-        <p14:section name="Algebra di Boole" id="{c7925e41-68f6-3e50-f2f7-125ba62b5a2a}">
+        <p14:section name="Algebra di Boole" id="{2c92e278-e44f-d2f1-dd02-cf603fb13905}">
           <p14:sldIdLst>
             <p14:sldId id="263"/>
             <p14:sldId id="264"/>
@@ -152,7 +152,7 @@
             <p14:sldId id="270"/>
           </p14:sldIdLst>
         </p14:section>
-        <p14:section name="Ritorno alla macchina" id="{f5205dee-e6bd-6df9-37b7-f3531cd2cd38}">
+        <p14:section name="Ritorno alla macchina" id="{b88de7b3-c72a-bb8b-d941-24a05bfaad86}">
           <p14:sldIdLst>
             <p14:sldId id="271"/>
             <p14:sldId id="272"/>

--- a/it/slides/08-Architettura_dei_Calcolatori-Algebra_di_Boole_1.pptx
+++ b/it/slides/08-Architettura_dei_Calcolatori-Algebra_di_Boole_1.pptx
@@ -125,13 +125,13 @@
   <p:extLst>
     <p:ext uri="{521415D9-36F7-43E2-AB2F-B90AF26B5E84}">
       <p14:sectionLst xmlns:p14="http://schemas.microsoft.com/office/powerpoint/2010/main">
-        <p14:section name="Apertura" id="{747a7956-a231-0606-8b25-61abc7bcd8af}">
+        <p14:section name="Apertura" id="{c11af0f6-b6ae-d8e1-c0fd-26315e2efba1}">
           <p14:sldIdLst>
             <p14:sldId id="256"/>
             <p14:sldId id="257"/>
           </p14:sldIdLst>
         </p14:section>
-        <p14:section name="Il calcolatore come macchina logica" id="{26877583-03f7-80ff-a059-79a7712b0596}">
+        <p14:section name="Il calcolatore come macchina logica" id="{a5c9bf23-31f4-61d8-6563-b36fbedbb6d9}">
           <p14:sldIdLst>
             <p14:sldId id="258"/>
             <p14:sldId id="259"/>
@@ -140,7 +140,7 @@
             <p14:sldId id="262"/>
           </p14:sldIdLst>
         </p14:section>
-        <p14:section name="Algebra di Boole" id="{2c92e278-e44f-d2f1-dd02-cf603fb13905}">
+        <p14:section name="Algebra di Boole" id="{cc0a88e3-7b2d-c52d-a233-09a2fb196a65}">
           <p14:sldIdLst>
             <p14:sldId id="263"/>
             <p14:sldId id="264"/>
@@ -152,7 +152,7 @@
             <p14:sldId id="270"/>
           </p14:sldIdLst>
         </p14:section>
-        <p14:section name="Ritorno alla macchina" id="{b88de7b3-c72a-bb8b-d941-24a05bfaad86}">
+        <p14:section name="Ritorno alla macchina" id="{1a0a23b1-0ed0-4587-b8d2-f2cb7e27dc26}">
           <p14:sldIdLst>
             <p14:sldId id="271"/>
             <p14:sldId id="272"/>
@@ -564,7 +564,7 @@
           <a:p>
             <a:r>
               <a:rPr lang="en-US" dirty="0"/>
-              <a:t>Comincia il secondo blocco del corso: la logica. Dopo aver imparato che cosa significano i bit, imparate come si combinano. In realtà usate l'algebra di Boole fin dai primi giorni, ogni volta che avete esaminato un pulsante con andi; questa lezione dà un nome a quell'operazione e le costruisce attorno l'algebra. Il Bianconiglio in copertina va sempre di fretta: anche il processore fa tutto a minuscoli passi logici, miliardi al secondo.
+              <a:t>Si apre il secondo blocco del corso: la logica. Stabilito che cosa significano i bit, il corso si chiede come si combinano. L'algebra di Boole è in realtà in uso fin dalle prime settimane, ogni volta che un pulsante è stato verificato con andi; questa lezione dà un nome a quell'operazione e costruisce l'algebra attorno a essa. Il Bianconiglio in copertina, sempre di fretta, è un emblema appropriato: anche il processore realizza ogni cosa attraverso minuscoli passi logici, miliardi al secondo.
 Stato di apprendimento: DA COMPRENDERE OGGI, alla fine di questa lezione lo spiegate, lo seguite passo passo e lo applicate da soli; DA UTILIZZARE OGGI, oggi seguite e usate la ricetta; come funziona dentro si spiega più avanti, o non fa parte del corso; DA COMPRENDERE PIÙ AVANTI, riconoscete il nome e lo scopo; lo spiega una lezione successiva. Una slide senza etichetta è contesto: una storia, un esempio, una domanda, un esercizio.
 Stato di apprendimento di questa lezione. DA COMPRENDERE OGGI: le maschere di bit; l'architettura di von Neumann; analisi e sintesi; l'algebra di Boole; le porte logiche. DA UTILIZZARE OGGI: il programma completo, gli strumenti di PRG32 (si usa, non si studia, in questo corso). DA COMPRENDERE PIÙ AVANTI: minimizzazione, Karnaugh (Lezione 09). Una slide senza etichetta è contesto: una storia, un esempio, una domanda, un esercizio.
 Per il docente: Spirale: gli studenti usano andi per esaminare un pulsante fin dai primi giorni. La lezione dà un nome a ciò che hanno fatto (una maschera è un AND), poi costruisce l'algebra, poi torna alle istruzioni bit a bit.</a:t>
@@ -655,7 +655,7 @@
           <a:p>
             <a:r>
               <a:rPr lang="en-US" dirty="0"/>
-              <a:t>Altre tre porte. XOR, l'or esclusivo, dà 1 quando i due ingressi sono diversi: è il bit di somma di un'addizione a un bit. NAND e NOR sono AND e OR seguiti da una negazione: il cerchietto sull'uscita di un simbolo significa sempre NOT. NAND dà 0 solo quando entrambi gli ingressi valgono 1; NOR dà 1 solo quando entrambi valgono 0. In pratica contano perché sono le porte più economiche da costruire con i transistor, come mostrerà la Lezione 10.
+              <a:t>Altre tre porte. XOR, l'OR esclusivo, dà 1 quando i suoi ingressi differiscono; è il bit di somma di un'addizione a un bit, come mostra il riscaldamento della Lezione 09. NAND e NOR sono AND e OR seguiti da una negazione, e il cerchietto all'uscita di un simbolo indica sempre NOT. NAND dà 0 solo quando entrambi gli ingressi sono 1; NOR dà 1 solo quando entrambi sono 0. La loro importanza pratica sta nel fatto che sono le porte più economiche da costruire con i transistor, come dimostra la Lezione 10.
 DA COMPRENDERE OGGI: le porte logiche.
 Per il docente: Slide nuova. XOR vale 1 quando gli ingressi sono diversi: è il bit di somma di un'addizione, e RISC-V lo ha come istruzione. Il cerchietto su un simbolo significa negazione.</a:t>
             </a:r>
@@ -745,7 +745,7 @@
           <a:p>
             <a:r>
               <a:rPr lang="en-US" dirty="0"/>
-              <a:t>Le prime quattro proprietà, ciascuna in due forme, una per AND e una per OR. Commutativa e associativa sono come nell'algebra ordinaria; grazie alla seconda, AND e OR si estendono a un numero qualsiasi di operandi. L'idempotenza è nuova: x AND x è x, e x OR x è x; ripetere una variabile non aggiunge nulla. L'assorbimento è la più utile per semplificare: x OR (x AND y) è semplicemente x, perché quando x vale 1 il risultato è 1 qualunque sia y, e quando x vale 0 entrambi i termini valgono 0.
+              <a:t>Le prime quattro proprietà, ciascuna enunciata in una forma per AND e in una per OR. Commutatività e associatività valgono come nell'algebra ordinaria, e la seconda permette di estendere AND e OR a un numero qualsiasi di operandi. L'idempotenza è nuova: x AND x è x, e x OR x è x; ripetere una variabile non aggiunge nulla. L'assorbimento è la più utile per semplificare: x OR (x AND y) è uguale a x, perché quando x è 1 il risultato è 1 qualunque sia y, e quando x è 0 entrambi i termini sono 0.
 DA COMPRENDERE OGGI: l'algebra di Boole.
 Per il docente: Grazie alla proprietà associativa AND e OR si possono definire su più di due operandi: x . y . z. Ogni proprietà viene in coppia: si scambia AND con OR.</a:t>
             </a:r>
@@ -835,7 +835,7 @@
           <a:p>
             <a:r>
               <a:rPr lang="en-US" dirty="0"/>
-              <a:t>Altre cinque proprietà. La prima legge distributiva è quella consueta. La seconda, x + yz = (x + y)(x + z), non ha equivalente nell'algebra ordinaria: qui anche OR si distribuisce rispetto ad AND. Poi le costanti: 1 è l'elemento neutro per AND e 0 per OR; 0 annulla un AND e 1 satura un OR. Le leggi del complemento dicono che una variabile e la sua negazione danno 0 con AND e 1 con OR. Involuzione: negare due volte restituisce la variabile. Due di queste, elemento neutro ed elemento nullo, spiegano come funziona una maschera.
+              <a:t>Altre cinque proprietà. La prima legge distributiva è quella familiare. La seconda, x + yz = (x + y)(x + z), non ha corrispondente nell'algebra ordinaria: qui anche l'OR si distribuisce sull'AND. Poi le costanti: 1 è l'elemento neutro dell'AND e 0 quello dell'OR; 0 annulla un AND e 1 satura un OR. Le leggi del complemento affermano che una variabile combinata con la sua negazione dà 0 con l'AND e 1 con l'OR. L'involuzione: la doppia negazione restituisce la variabile. Due di queste proprietà, l'elemento neutro e l'elemento nullo, sono esattamente ciò che fa funzionare una maschera di bit.
 DA COMPRENDERE OGGI: l'algebra di Boole.
 Per il docente: La seconda legge distributiva non ha un corrispettivo nell'algebra ordinaria. La slide originale chiamava l'involuzione «convoluzione» e raggruppava elemento neutro ed elemento nullo come «minimo e massimo»; le leggi del complemento sono aggiunte qui.</a:t>
             </a:r>
@@ -925,7 +925,7 @@
           <a:p>
             <a:r>
               <a:rPr lang="en-US" dirty="0"/>
-              <a:t>Le leggi di De Morgan collegano le tre operazioni: il complemento di un prodotto è la somma dei complementi, e il complemento di una somma è il prodotto dei complementi. La tabella dimostra la prima per induzione perfetta: poiché le variabili hanno solo due valori, una legge si verifica controllando ogni riga. Le due colonne evidenziate sono identiche. In termini di porte: un NAND è un OR con gli ingressi negati. Userete queste leggi di continuo, su carta e nei programmi.
+              <a:t>Le leggi di De Morgan collegano le tre operazioni: il complemento di un prodotto è la somma dei complementi, e il complemento di una somma è il prodotto dei complementi. La tabella dimostra la prima per induzione completa: poiché ogni variabile assume due soli valori, una legge si può stabilire verificando in modo esaustivo ogni riga, e le due colonne evidenziate coincidono. In termini di porte, un NAND è un OR con ingressi negati. Queste leggi si useranno di continuo, sulla carta e nei programmi.
 DA COMPRENDERE OGGI: l'algebra di Boole.
 Per il docente: Augustus De Morgan, 1847. Le leggi si generalizzano a un numero qualsiasi di variabili. La presentazione originale mostrava la dimostrazione come immagine.</a:t>
             </a:r>
@@ -1015,7 +1015,7 @@
           <a:p>
             <a:r>
               <a:rPr lang="en-US" dirty="0"/>
-              <a:t>Due regole generali. Dualità: ogni identità resta vera scambiando AND con OR e 0 con 1; per questo le proprietà venivano a coppie, e dimostrarle costa la metà. Precedenza: prima si applica NOT, poi AND, poi OR, come le potenze vengono prima dei prodotti e i prodotti prima delle somme; le parentesi cambiano l'ordine. E una definizione da ricordare: due espressioni sono equivalenti quando hanno la stessa tabella di verità.
+              <a:t>Due principi generali. La dualità: ogni identità resta valida scambiando AND e OR insieme a 0 e 1; è per questo che le proprietà comparivano a coppie, e dimezza il lavoro di dimostrarle. La precedenza: si applica prima NOT, poi AND, poi OR, così come l'elevamento a potenza precede la moltiplicazione e la moltiplicazione precede la somma; le parentesi cambiano l'ordine. E una definizione da conservare: due espressioni sono equivalenti quando hanno la stessa tavola di verità.
 DA COMPRENDERE OGGI: l'algebra di Boole.
 Per il docente: La dualità dimezza il lavoro: dimostrata una legge di ogni coppia, l'altra segue.</a:t>
             </a:r>
@@ -1105,7 +1105,7 @@
           <a:p>
             <a:r>
               <a:rPr lang="en-US" dirty="0"/>
-              <a:t>L'algebra al lavoro. L'espressione xy + xy' richiede due porte AND, una OR e un invertitore. Raccogliendo x con la legge distributiva si ottiene x(y + y'); la legge del complemento trasforma la parentesi in 1; l'elemento neutro lascia x. Tre porte sono diventate un pezzo di filo. Ogni riga della tabella nomina la legge che la giustifica: quando semplificate, siate sempre in grado di dire quale legge state applicando. La didascalia mostra una seconda semplificazione che servirà ancora.
+              <a:t>L'algebra al lavoro. L'espressione xy + xy' richiede due porte AND, una porta OR e un invertitore. Raccogliendo x con la legge distributiva si ottiene x(y + y'); la legge del complemento riduce la parentesi a 1; la legge dell'elemento neutro lascia x. Quattro porte sono diventate un filo. Ogni riga della derivazione nomina la legge che la giustifica, e questa disciplina va adottata: in una semplificazione ogni passo deve essere attribuibile a una legge. La didascalia mostra una seconda semplificazione che tornerà nella Lezione 09.
 DA COMPRENDERE OGGI: l'algebra di Boole.
 Per il docente: Due letterali e tre porte diventano un filo. L'identità nella didascalia (detta a volte teorema di semplificazione) usa la distributività di OR rispetto ad AND; la si riusa nella Lezione 09.</a:t>
             </a:r>
@@ -1195,8 +1195,8 @@
           <a:p>
             <a:r>
               <a:rPr lang="en-US" dirty="0"/>
-              <a:t>NAND è AND seguito da NOT. Partite da AND: per quale unica riga della sua tabella l'uscita vale 1? Quella è la sola riga in cui NAND vale 0.
-Applicate la prima legge di De Morgan al prodotto di a e b': il complemento diventa la somma dei complementi, a' più il complemento di b'. Poi usate l'involuzione sul secondo termine.
+              <a:t>Per la prima domanda, NAND è AND seguito da NOT. Partendo dall'AND si individua l'unica riga della sua tavola con uscita 1; è l'unica riga in cui NAND dà 0.
+Per la seconda si applica la prima legge di De Morgan al prodotto di a e b': il complemento diventa la somma dei complementi, a' più il complemento di b'. L'involuzione semplifica poi il secondo termine.
 Per il docente: 1. Risposta: C. NAND è il complemento di AND: vale 0 solo quando entrambi gli ingressi valgono 1.
 2. Risposta: B. (a . b')' = a' + (b')' = a' + b, usando l'involuzione sul secondo termine.</a:t>
             </a:r>
@@ -1286,8 +1286,8 @@
           <a:p>
             <a:r>
               <a:rPr lang="en-US" dirty="0"/>
-              <a:t>Scrivete in binario 0x5A, 0101 1010, e la maschera 0x0F, 0000 1111. L'AND conserva i bit dove la maschera ha 1, i quattro bassi, e azzera gli altri.
-Confrontate le quattro istruzioni con la tabella della maschera. AND con 0x20 azzererebbe tutti gli altri bit. XOR invertirebbe il bit, trasformando un 1 in uno 0. Una somma aritmetica funzionerebbe solo se il bit fosse 0, e altrimenti produrrebbe un riporto. Solo OR pone il bit a 1 e lascia invariato il resto.
+              <a:t>Per la prima domanda, 0x5A si scrive in binario, 0101 1010, e la maschera 0x0F come 0000 1111. L'AND conserva i bit dove la maschera ha un 1, i quattro bassi, e azzera gli altri.
+Per la seconda, le quattro istruzioni si confrontano con la tabella delle operazioni con maschera. AND con 0x20 azzererebbe ogni altro bit; XOR invertirebbe il bit, portando un 1 a 0; una somma aritmetica funzionerebbe solo se il bit fosse 0, e altrimenti propagherebbe un riporto. Solo OR pone a uno il bit lasciando invariati tutti gli altri.
 Per il docente: 1. Risposta: C. 0x5A = 0101 1010; AND con 0000 1111 conserva il nibble basso: 1010 = 0xA.
 2. Risposta: B. OR con una maschera: x + 1 = 1 sul bit 5, x + 0 = x altrove. xori lo invertirebbe; addi propagherebbe un riporto nel bit 6 se il bit fosse già a 1.</a:t>
             </a:r>
@@ -1377,7 +1377,7 @@
           <a:p>
             <a:r>
               <a:rPr lang="en-US" dirty="0"/>
-              <a:t>Dodici termini. Truth table, tabella di verità, è la tabella che definisce una funzione elencando tutti i casi. Logical product e logical sum, prodotto e somma logica, sono AND e OR. To set, to clear e to toggle un bit significano porlo a 1, azzerarlo e invertirlo; l'italiano non ha verbi singoli e usa brevi locuzioni.</a:t>
+              <a:t>Dodici termini. La tavola di verità definisce una funzione enumerandone in modo esaustivo i casi. Prodotto logico e somma logica sono AND e OR. To set, to clear e to toggle un bit significano porlo a 1, porlo a 0 e invertirlo; l'italiano non ha verbi singoli per questi e usa brevi locuzioni.</a:t>
             </a:r>
             <a:endParaRPr lang="en-US" dirty="0"/>
           </a:p>
@@ -1465,7 +1465,7 @@
           <a:p>
             <a:r>
               <a:rPr lang="en-US" dirty="0"/>
-              <a:t>Quattro conclusioni. L'architettura di von Neumann descrive in forma semplificata una macchina reale. L'algebra di Boole descrive funzioni logiche che i circuiti elettronici possono realizzare. Tre operazioni, poche proprietà e le leggi di De Morgan bastano a trasformare qualunque espressione. E un'istruzione bit a bit è l'algebra applicata a trentadue bit insieme, con la maschera come legge dell'elemento neutro al lavoro. La prossima lezione passa dagli operatori alle funzioni: forme canoniche e minimizzazione.
+              <a:t>Quattro conclusioni. L'architettura di von Neumann descrive una macchina reale in forma semplificata. L'algebra di Boole descrive le funzioni logiche che i circuiti elettronici realizzano. Tre operazioni, una manciata di proprietà e le leggi di De Morgan bastano per trasformare qualsiasi espressione. E un'istruzione bit a bit è l'algebra applicata in parallelo a trentadue bit, con la maschera come leggi dell'elemento neutro e dell'elemento nullo al lavoro. La prossima lezione passa dagli operatori alle funzioni: forme canoniche e minimizzazione.
 Stato di apprendimento, riepilogo. DA COMPRENDERE OGGI: le maschere di bit; l'architettura di von Neumann; analisi e sintesi; l'algebra di Boole; le porte logiche. DA UTILIZZARE OGGI: il programma completo, gli strumenti di PRG32 (si usa, non si studia, in questo corso). DA COMPRENDERE PIÙ AVANTI: minimizzazione, Karnaugh (Lezione 09). Una slide senza etichetta è contesto: una storia, un esempio, una domanda, un esercizio.
 Per il docente: Prossima lezione: funzioni booleane, forme canoniche e minimizzazione.</a:t>
             </a:r>
@@ -1555,7 +1555,7 @@
           <a:p>
             <a:r>
               <a:rPr lang="en-US" dirty="0"/>
-              <a:t>Cinque obiettivi. Descrivere un calcolatore come tre sottosistemi collegati da un bus. Distinguere i due problemi del progetto logico, analisi e sintesi. Scrivere le tabelle di verità e riconoscere i simboli di sei porte. Applicare le proprietà dell'algebra, leggi di De Morgan comprese, per semplificare un'espressione. E, di ritorno sulla macchina, usare le istruzioni bit a bit di RISC-V per esaminare, porre a 1, azzerare e invertire singoli bit di un registro.</a:t>
+              <a:t>Cinque risultati di apprendimento. Descrivere un calcolatore come tre sottosistemi collegati da un bus. Distinguere i due problemi fondamentali del progetto logico, analisi e sintesi. Scrivere le tavole di verità di sei porte e riconoscerne i simboli. Applicare le proprietà dell'algebra, leggi di De Morgan comprese, per semplificare un'espressione. E, tornando alla macchina, usare le istruzioni bit a bit di RISC-V per verificare, porre a uno, azzerare e invertire singoli bit di un registro.</a:t>
             </a:r>
             <a:endParaRPr lang="en-US" dirty="0"/>
           </a:p>
@@ -1643,7 +1643,7 @@
           <a:p>
             <a:r>
               <a:rPr lang="en-US" dirty="0"/>
-              <a:t>Un calcolatore ha tre sottosistemi: il processore, che esegue le istruzioni; la memoria centrale, che contiene istruzioni e dati; e l'ingresso/uscita, che collega la macchina al mondo. Sono uniti da un bus, un insieme di fili condivisi diviso in linee degli indirizzi, linee dei dati e linee di controllo. È il modello di von Neumann della Lezione 03 in termini odierni. Tutto ciò che viaggia sul bus è una configurazione di bit. Sull'ESP32-C6 tutto questo sta dentro un solo chip.
+              <a:t>Un calcolatore comprende tre sottosistemi: il processore, che esegue le istruzioni; la memoria centrale, che contiene istruzioni e dati; e il sottosistema di ingresso/uscita, che collega la macchina al mondo. Comunicano attraverso un bus, un insieme di linee condivise diviso in linee di indirizzo, linee di dato e linee di controllo. È il modello di von Neumann della Lezione 03 espresso in termini contemporanei. Tutto ciò che viaggia sul bus è una configurazione di bit. Sull'ESP32-C6 i tre sottosistemi risiedono su un solo chip.
 DA COMPRENDERE OGGI: l'architettura di von Neumann.
 Per il docente: Sostituisce le due figure della presentazione originale (modello di von Neumann; architettura a bus). Sull'ESP32-C6 i tre sottosistemi e il bus stanno tutti dentro un solo chip.</a:t>
             </a:r>
@@ -1733,7 +1733,7 @@
           <a:p>
             <a:r>
               <a:rPr lang="en-US" dirty="0"/>
-              <a:t>Nel processore risiede la capacità di elaborazione. Esegue istruzioni, che sono comandi espliciti di due tipi: quelli che governano il trasferimento dell'informazione, dentro il calcolatore e da e verso i dispositivi, e quelli che specificano operazioni aritmetiche e logiche. La memoria contiene i dati e la sequenza delle istruzioni, e una sequenza di istruzioni memorizzata è un programma. Il processore fa una cosa sola, all'infinito: preleva un'istruzione, la esegue, e ripete.
+              <a:t>Il processore è la sede della capacità di calcolo. Esegue istruzioni, comandi espliciti di due tipi: quelli che governano il trasferimento dell'informazione, dentro il calcolatore e tra esso e i suoi dispositivi, e quelli che specificano operazioni aritmetiche e logiche. La memoria contiene sia i dati sia la sequenza delle istruzioni, e una sequenza di istruzioni memorizzata è un programma. Il processore svolge un'unica attività all'infinito: preleva un'istruzione, la esegue e ricomincia. La Lezione 19 esamina questo ciclo nel dettaglio.
 DA COMPRENDERE OGGI: l'architettura di von Neumann.
 Per il docente: RV32I: circa quaranta istruzioni. Avete usato addi, lw, sw, andi, beqz, call e ret: trasferimento, aritmetica, logica e controllo ci sono tutti.</a:t>
             </a:r>
@@ -1823,7 +1823,7 @@
           <a:p>
             <a:r>
               <a:rPr lang="en-US" dirty="0"/>
-              <a:t>Quattro aggettivi definiscono un calcolatore elettronico. Numerico, o digitale: tutta l'informazione è fatta di stringhe di bit. Automatico: una volta avviato procede da solo. A programma memorizzato: il programma sta in memoria e si può sostituire, quindi la stessa macchina fa lavori diversi. Elettronico: è costruito con circuiti che memorizzano ed elaborano bit. Ogni aggettivo esclude qualcosa: un abaco è numerico ma non automatico; un carillon meccanico è automatico ma il suo programma è fisso.
+              <a:t>Quattro attributi caratterizzano un calcolatore elettronico. Numerico, o digitale: ogni informazione è rappresentata come stringa di bit. Automatico: una volta avviato, procede senza intervento. A programma memorizzato: il programma risiede in memoria e si può sostituire, quindi la stessa macchina svolge compiti diversi. Elettronico: è costruito con circuiti che memorizzano ed elaborano bit. Ogni attributo esclude qualcosa: un abaco è numerico ma non automatico; un carillon meccanico è automatico ma il suo programma è fisso.
 DA COMPRENDERE OGGI: l'architettura di von Neumann.</a:t>
             </a:r>
             <a:endParaRPr lang="en-US" dirty="0"/>
@@ -1912,7 +1912,7 @@
           <a:p>
             <a:r>
               <a:rPr lang="en-US" dirty="0"/>
-              <a:t>I circuiti che memorizzano ed elaborano i bit si chiamano circuiti di commutazione, o circuiti logici; collegati tra loro formano una rete di commutazione, e progettarne una è il progetto logico. Per descrivere ciò che fanno questi circuiti si usa un'algebra. Svolge per i circuiti il ruolo che l'algebra ordinaria svolge per le grandezze: una notazione in cui si può calcolare invece di provare ogni caso. I valori sono due, 0 e 1: due livelli di tensione, due stati di un interruttore.
+              <a:t>I circuiti che memorizzano ed elaborano i bit si chiamano circuiti di commutazione, o circuiti logici; interconnessi formano una rete di commutazione, e il loro progetto si chiama progetto logico. Descriverne il comportamento richiede un'algebra, che svolge per i circuiti il ruolo che l'algebra ordinaria svolge per le grandezze: una notazione in cui si può calcolare invece di enumerare ogni caso. I valori sono due, 0 e 1, che corrispondono fisicamente a due livelli di tensione o a due stati di un interruttore, una corrispondenza che la Lezione 10 rende precisa.
 DA COMPRENDERE OGGI: analisi e sintesi.
 Per il docente: Circuiti di commutazione: switching circuits. L'algebra è quella di Boole (1854), applicata agli interruttori da Nakajima e Shannon negli anni Trenta (Lezione 03).</a:t>
             </a:r>
@@ -2002,7 +2002,7 @@
           <a:p>
             <a:r>
               <a:rPr lang="en-US" dirty="0"/>
-              <a:t>Due problemi, e una sola algebra per entrambi. Analisi: è data la struttura di un circuito, come è fatto, e se ne deve trovare il comportamento, che cosa fa. Leggere andi t3, t0, 1 e dire che cosa finisce in t3 è analisi. La sintesi va nell'altro verso: da un comportamento desiderato a una struttura che lo realizza, per esempio dalla tabella di una somma a un addizionatore. La sintesi ha di solito molte soluzioni; scegliere la più economica è l'argomento della prossima lezione.
+              <a:t>Due problemi, affrontati con una sola algebra. Analisi: data la struttura di un circuito, come è fatto, determinarne il comportamento, che cosa calcola. Leggere andi t3, t0, 1 e dire che cosa conterrà t3 è analisi. La sintesi procede nella direzione opposta: da un comportamento specificato a una struttura che lo realizza, per esempio dalla tavola di una somma a un sommatore. L'analisi ha una risposta unica; la sintesi in generale ne ha molte, e scegliere la meno costosa tra esse è il problema della minimizzazione trattato nella Lezione 09.
 DA COMPRENDERE OGGI: analisi e sintesi. DA COMPRENDERE PIÙ AVANTI: minimizzazione, Karnaugh (si studia nella Lezione 09).
 Per il docente: La sintesi ha di solito molte soluzioni; scegliere la più economica è il problema di minimizzazione della Lezione 09.</a:t>
             </a:r>
@@ -2092,7 +2092,7 @@
           <a:p>
             <a:r>
               <a:rPr lang="en-US" dirty="0"/>
-              <a:t>Nell'algebra di Boole una variabile può assumere solo due valori, 0 e 1, e le operazioni di base sono tre. AND, il prodotto logico, scritto con un punto o semplicemente accostando le variabili. OR, la somma logica, scritta con il segno più. NOT, il complemento, scritto qui con un apice, come in x', per poterlo battere a tastiera. Non fatevi ingannare dai simboli: il più non è una somma aritmetica, come vedrete subito nella tabella di verità di OR.
+              <a:t>Nell'algebra di Boole una variabile assume due soli valori, 0 e 1, e ci sono tre operazioni fondamentali. AND, il prodotto logico, scritto con un punto o per giustapposizione. OR, la somma logica, scritta con il segno più. NOT, il complemento, scritto qui con un apice, x', per comodità di battitura. La notazione non deve trarre in inganno: il segno più non indica una somma aritmetica, come mostra subito la tavola di verità dell'OR.
 DA COMPRENDERE OGGI: l'algebra di Boole.
 Per il docente: Congiunzione, disgiunzione, negazione: conjunction, disjunction, negation. In queste slide il complemento si scrive con un apice (x') per poterlo battere a tastiera.</a:t>
             </a:r>
@@ -2182,7 +2182,7 @@
           <a:p>
             <a:r>
               <a:rPr lang="en-US" dirty="0"/>
-              <a:t>Ogni riquadro mostra un'operazione in tre modi: il simbolo della porta, la notazione e la tabella di verità, che elenca l'uscita per ogni combinazione degli ingressi. AND dà 1 solo quando entrambi gli ingressi valgono 1. OR dà 0 solo quando entrambi valgono 0, quindi 1 OR 1 fa 1, non 2. NOT ha un solo ingresso e lo inverte. Imparate le tre forme: dorso piatto e fronte tonda per AND, dorso curvo e fronte a punta per OR, un triangolo con un cerchietto per NOT.
+              <a:t>Ogni riquadro presenta un'operazione in tre forme: il simbolo della porta, la notazione algebrica e la tavola di verità, che elenca l'uscita per ogni combinazione degli ingressi. AND dà 1 solo quando entrambi gli ingressi sono 1. OR dà 0 solo quando entrambi gli ingressi sono 0, quindi 1 OR 1 vale 1, non 2. NOT ha un solo ingresso e lo inverte. Le tre forme vanno imparate: dorso piatto e fronte arrotondata per AND, dorso curvo e fronte appuntita per OR, un triangolo con un cerchietto per NOT.
 DA COMPRENDERE OGGI: le porte logiche.
 Per il docente: AND vale 1 solo quando entrambi gli ingressi valgono 1; OR vale 0 solo quando entrambi valgono 0; NOT inverte. Una tabella di verità elenca l'uscita per ogni combinazione degli ingressi.</a:t>
             </a:r>
@@ -3262,7 +3262,7 @@
                 <a:ea typeface="Calibri" pitchFamily="34" charset="-122"/>
                 <a:cs typeface="Calibri" pitchFamily="34" charset="-120"/>
               </a:rPr>
-              <a:t>08-Architettura_dei_Calcolatori-Algebra_di_Boole_1-Codice.pptx</a:t>
+              <a:t>08-Architettura_dei_Calcolatori-Algebra_di_Boole_1-Lab.pptx</a:t>
             </a:r>
             <a:endParaRPr lang="en-US" sz="1300" dirty="0"/>
           </a:p>

--- a/it/slides/08-Architettura_dei_Calcolatori-Algebra_di_Boole_1.pptx
+++ b/it/slides/08-Architettura_dei_Calcolatori-Algebra_di_Boole_1.pptx
@@ -125,13 +125,13 @@
   <p:extLst>
     <p:ext uri="{521415D9-36F7-43E2-AB2F-B90AF26B5E84}">
       <p14:sectionLst xmlns:p14="http://schemas.microsoft.com/office/powerpoint/2010/main">
-        <p14:section name="Apertura" id="{c11af0f6-b6ae-d8e1-c0fd-26315e2efba1}">
+        <p14:section name="Apertura" id="{25952d97-95ea-be39-c926-b6c47aa36f8b}">
           <p14:sldIdLst>
             <p14:sldId id="256"/>
             <p14:sldId id="257"/>
           </p14:sldIdLst>
         </p14:section>
-        <p14:section name="Il calcolatore come macchina logica" id="{a5c9bf23-31f4-61d8-6563-b36fbedbb6d9}">
+        <p14:section name="Il calcolatore come macchina logica" id="{3e7bf378-cd73-9dcb-9dbd-f2748a97a6cb}">
           <p14:sldIdLst>
             <p14:sldId id="258"/>
             <p14:sldId id="259"/>
@@ -140,7 +140,7 @@
             <p14:sldId id="262"/>
           </p14:sldIdLst>
         </p14:section>
-        <p14:section name="Algebra di Boole" id="{cc0a88e3-7b2d-c52d-a233-09a2fb196a65}">
+        <p14:section name="Algebra di Boole" id="{986ac178-53db-2679-0364-29ee62b24108}">
           <p14:sldIdLst>
             <p14:sldId id="263"/>
             <p14:sldId id="264"/>
@@ -152,7 +152,7 @@
             <p14:sldId id="270"/>
           </p14:sldIdLst>
         </p14:section>
-        <p14:section name="Ritorno alla macchina" id="{1a0a23b1-0ed0-4587-b8d2-f2cb7e27dc26}">
+        <p14:section name="Ritorno alla macchina" id="{506169ff-ee59-fc5a-3e4c-76ff3737cc83}">
           <p14:sldIdLst>
             <p14:sldId id="271"/>
             <p14:sldId id="272"/>

--- a/it/slides/08-Architettura_dei_Calcolatori-Algebra_di_Boole_1.pptx
+++ b/it/slides/08-Architettura_dei_Calcolatori-Algebra_di_Boole_1.pptx
@@ -125,13 +125,13 @@
   <p:extLst>
     <p:ext uri="{521415D9-36F7-43E2-AB2F-B90AF26B5E84}">
       <p14:sectionLst xmlns:p14="http://schemas.microsoft.com/office/powerpoint/2010/main">
-        <p14:section name="Apertura" id="{25952d97-95ea-be39-c926-b6c47aa36f8b}">
+        <p14:section name="Apertura" id="{66de4fbd-a447-0718-221a-7bc1f4a09f51}">
           <p14:sldIdLst>
             <p14:sldId id="256"/>
             <p14:sldId id="257"/>
           </p14:sldIdLst>
         </p14:section>
-        <p14:section name="Il calcolatore come macchina logica" id="{3e7bf378-cd73-9dcb-9dbd-f2748a97a6cb}">
+        <p14:section name="Il calcolatore come macchina logica" id="{4b2b9ded-b399-f6dd-4e5e-4b3e545f2484}">
           <p14:sldIdLst>
             <p14:sldId id="258"/>
             <p14:sldId id="259"/>
@@ -140,7 +140,7 @@
             <p14:sldId id="262"/>
           </p14:sldIdLst>
         </p14:section>
-        <p14:section name="Algebra di Boole" id="{986ac178-53db-2679-0364-29ee62b24108}">
+        <p14:section name="Algebra di Boole" id="{9576a2d0-4f7b-dad9-4060-1411ce8879d3}">
           <p14:sldIdLst>
             <p14:sldId id="263"/>
             <p14:sldId id="264"/>
@@ -152,7 +152,7 @@
             <p14:sldId id="270"/>
           </p14:sldIdLst>
         </p14:section>
-        <p14:section name="Ritorno alla macchina" id="{506169ff-ee59-fc5a-3e4c-76ff3737cc83}">
+        <p14:section name="Ritorno alla macchina" id="{e1a21cd0-da19-291f-415d-c023421d0a27}">
           <p14:sldIdLst>
             <p14:sldId id="271"/>
             <p14:sldId id="272"/>
@@ -567,6 +567,7 @@
               <a:t>Si apre il secondo blocco del corso: la logica. Stabilito che cosa significano i bit, il corso si chiede come si combinano. L'algebra di Boole è in realtà in uso fin dalle prime settimane, ogni volta che un pulsante è stato verificato con andi; questa lezione dà un nome a quell'operazione e costruisce l'algebra attorno a essa. Il Bianconiglio in copertina, sempre di fretta, è un emblema appropriato: anche il processore realizza ogni cosa attraverso minuscoli passi logici, miliardi al secondo.
 Stato di apprendimento: DA COMPRENDERE OGGI, alla fine di questa lezione lo spiegate, lo seguite passo passo e lo applicate da soli; DA UTILIZZARE OGGI, oggi seguite e usate la ricetta; come funziona dentro si spiega più avanti, o non fa parte del corso; DA COMPRENDERE PIÙ AVANTI, riconoscete il nome e lo scopo; lo spiega una lezione successiva. Una slide senza etichetta è contesto: una storia, un esempio, una domanda, un esercizio.
 Stato di apprendimento di questa lezione. DA COMPRENDERE OGGI: le maschere di bit; l'architettura di von Neumann; analisi e sintesi; l'algebra di Boole; le porte logiche. DA UTILIZZARE OGGI: il programma completo, gli strumenti di PRG32 (si usa, non si studia, in questo corso). DA COMPRENDERE PIÙ AVANTI: minimizzazione, Karnaugh (Lezione 09). Una slide senza etichetta è contesto: una storia, un esempio, una domanda, un esercizio.
+Percorso. I risultati di oggi: (1) distinguere l'analisi di un circuito logico dalla sua sintesi; (2) applicare gli assiomi e i teoremi dell'algebra di Boole, compreso De Morgan; (3) porre a 1, azzerare e verificare bit con le maschere. Si appoggia su: l'architettura di von Neumann (Lezione 03). Prossimo passo: Lezione 09, Elementi di algebra di Boole.
 Per il docente: Spirale: gli studenti usano andi per esaminare un pulsante fin dai primi giorni. La lezione dà un nome a ciò che hanno fatto (una maschera è un AND), poi costruisce l'algebra, poi torna alle istruzioni bit a bit.</a:t>
             </a:r>
             <a:endParaRPr lang="en-US" dirty="0"/>
@@ -1466,7 +1467,7 @@
             <a:r>
               <a:rPr lang="en-US" dirty="0"/>
               <a:t>Quattro conclusioni. L'architettura di von Neumann descrive una macchina reale in forma semplificata. L'algebra di Boole descrive le funzioni logiche che i circuiti elettronici realizzano. Tre operazioni, una manciata di proprietà e le leggi di De Morgan bastano per trasformare qualsiasi espressione. E un'istruzione bit a bit è l'algebra applicata in parallelo a trentadue bit, con la maschera come leggi dell'elemento neutro e dell'elemento nullo al lavoro. La prossima lezione passa dagli operatori alle funzioni: forme canoniche e minimizzazione.
-Stato di apprendimento, riepilogo. DA COMPRENDERE OGGI: le maschere di bit; l'architettura di von Neumann; analisi e sintesi; l'algebra di Boole; le porte logiche. DA UTILIZZARE OGGI: il programma completo, gli strumenti di PRG32 (si usa, non si studia, in questo corso). DA COMPRENDERE PIÙ AVANTI: minimizzazione, Karnaugh (Lezione 09). Una slide senza etichetta è contesto: una storia, un esempio, una domanda, un esercizio.
+Stato di apprendimento, riepilogo. DA COMPRENDERE OGGI: le maschere di bit; l'architettura di von Neumann; analisi e sintesi; l'algebra di Boole; le porte logiche. DA UTILIZZARE OGGI: il programma completo, gli strumenti di PRG32 (si usa, non si studia, in questo corso). DA COMPRENDERE PIÙ AVANTI: minimizzazione, Karnaugh (Lezione 09). Una slide senza etichetta è contesto: una storia, un esempio, una domanda, un esercizio. Il filo della lezione: andi t3, t0, 1 è una fila di 32 porte AND: l'algebra di Boole descrive sia l'istruzione sia il circuito. Prossimo passo: da una tabella di verità al circuito più piccolo. Biglietto d'uscita (da due a quattro minuti, da soli, su carta): 1. Analisi o sintesi? (a) Dato uno schema, trovarne la tabella di verità. (b) Dato 'la luce è accesa quando esattamente uno dei due interruttori è alzato', costruire un circuito. (c) Leggere andi t3, t0, 1 e dire che cosa finisce in t3. 2. Scrivete un'istruzione che pone a 1 il bit 3 di t0 lasciando invariati gli altri bit, e una che lo azzera.
 Per il docente: Prossima lezione: funzioni booleane, forme canoniche e minimizzazione.</a:t>
             </a:r>
             <a:endParaRPr lang="en-US" dirty="0"/>
